--- a/exports/pptx/lessons/middle-module-02-panchabhuta/day-04-element-sort.pptx
+++ b/exports/pptx/lessons/middle-module-02-panchabhuta/day-04-element-sort.pptx
@@ -18,9 +18,13 @@
     <p:sldId id="266" r:id="rId12"/>
     <p:sldId id="267" r:id="rId13"/>
     <p:sldId id="268" r:id="rId14"/>
+    <p:sldId id="269" r:id="rId15"/>
+    <p:sldId id="270" r:id="rId16"/>
+    <p:sldId id="271" r:id="rId17"/>
+    <p:sldId id="272" r:id="rId18"/>
   </p:sldIdLst>
   <p:notesMasterIdLst>
-    <p:notesMasterId r:id="rId15"/>
+    <p:notesMasterId r:id="rId19"/>
   </p:notesMasterIdLst>
   <p:sldSz cx="9144000" cy="5143500"/>
   <p:notesSz cx="5143500" cy="9144000"/>
@@ -890,6 +894,358 @@
             <a:fld id="{F7021451-1387-4CA6-816F-3879F97B5CBC}" type="slidenum">
               <a:rPr lang="en-US"/>
               <a:t>13</a:t>
+            </a:fld>
+            <a:endParaRPr lang="en-US"/>
+          </a:p>
+        </p:txBody>
+      </p:sp>
+    </p:spTree>
+    <p:extLst>
+      <p:ext uri="{BB962C8B-B14F-4D97-AF65-F5344CB8AC3E}">
+        <p14:creationId xmlns:p14="http://schemas.microsoft.com/office/powerpoint/2010/main" val="1024086991"/>
+      </p:ext>
+    </p:extLst>
+  </p:cSld>
+  <p:clrMapOvr>
+    <a:masterClrMapping/>
+  </p:clrMapOvr>
+</p:notes>
+</file>
+
+<file path=ppt/notesSlides/notesSlide14.xml><?xml version="1.0" encoding="utf-8"?>
+<p:notes xmlns:a="http://schemas.openxmlformats.org/drawingml/2006/main" xmlns:r="http://schemas.openxmlformats.org/officeDocument/2006/relationships" xmlns:p="http://schemas.openxmlformats.org/presentationml/2006/main">
+  <p:cSld>
+    <p:spTree>
+      <p:nvGrpSpPr>
+        <p:cNvPr id="1" name=""/>
+        <p:cNvGrpSpPr/>
+        <p:nvPr/>
+      </p:nvGrpSpPr>
+      <p:grpSpPr>
+        <a:xfrm>
+          <a:off x="0" y="0"/>
+          <a:ext cx="0" cy="0"/>
+          <a:chOff x="0" y="0"/>
+          <a:chExt cx="0" cy="0"/>
+        </a:xfrm>
+      </p:grpSpPr>
+      <p:sp>
+        <p:nvSpPr>
+          <p:cNvPr id="2" name="Slide Image Placeholder 1"/>
+          <p:cNvSpPr>
+            <a:spLocks noGrp="1" noRot="1" noChangeAspect="1"/>
+          </p:cNvSpPr>
+          <p:nvPr>
+            <p:ph type="sldImg"/>
+          </p:nvPr>
+        </p:nvSpPr>
+        <p:spPr/>
+      </p:sp>
+      <p:sp>
+        <p:nvSpPr>
+          <p:cNvPr id="3" name="Notes Placeholder 2"/>
+          <p:cNvSpPr>
+            <a:spLocks noGrp="1"/>
+          </p:cNvSpPr>
+          <p:nvPr>
+            <p:ph type="body" idx="1"/>
+          </p:nvPr>
+        </p:nvSpPr>
+        <p:spPr/>
+        <p:txBody>
+          <a:bodyPr/>
+          <a:lstStyle/>
+          <a:p>
+            <a:r>
+              <a:rPr lang="en-US" dirty="0"/>
+              <a:t/>
+            </a:r>
+            <a:endParaRPr lang="en-US" dirty="0"/>
+          </a:p>
+        </p:txBody>
+      </p:sp>
+      <p:sp>
+        <p:nvSpPr>
+          <p:cNvPr id="4" name="Slide Number Placeholder 3"/>
+          <p:cNvSpPr>
+            <a:spLocks noGrp="1"/>
+          </p:cNvSpPr>
+          <p:nvPr>
+            <p:ph type="sldNum" sz="quarter" idx="10"/>
+          </p:nvPr>
+        </p:nvSpPr>
+        <p:spPr/>
+        <p:txBody>
+          <a:bodyPr/>
+          <a:lstStyle/>
+          <a:p>
+            <a:fld id="{F7021451-1387-4CA6-816F-3879F97B5CBC}" type="slidenum">
+              <a:rPr lang="en-US"/>
+              <a:t>14</a:t>
+            </a:fld>
+            <a:endParaRPr lang="en-US"/>
+          </a:p>
+        </p:txBody>
+      </p:sp>
+    </p:spTree>
+    <p:extLst>
+      <p:ext uri="{BB962C8B-B14F-4D97-AF65-F5344CB8AC3E}">
+        <p14:creationId xmlns:p14="http://schemas.microsoft.com/office/powerpoint/2010/main" val="1024086991"/>
+      </p:ext>
+    </p:extLst>
+  </p:cSld>
+  <p:clrMapOvr>
+    <a:masterClrMapping/>
+  </p:clrMapOvr>
+</p:notes>
+</file>
+
+<file path=ppt/notesSlides/notesSlide15.xml><?xml version="1.0" encoding="utf-8"?>
+<p:notes xmlns:a="http://schemas.openxmlformats.org/drawingml/2006/main" xmlns:r="http://schemas.openxmlformats.org/officeDocument/2006/relationships" xmlns:p="http://schemas.openxmlformats.org/presentationml/2006/main">
+  <p:cSld>
+    <p:spTree>
+      <p:nvGrpSpPr>
+        <p:cNvPr id="1" name=""/>
+        <p:cNvGrpSpPr/>
+        <p:nvPr/>
+      </p:nvGrpSpPr>
+      <p:grpSpPr>
+        <a:xfrm>
+          <a:off x="0" y="0"/>
+          <a:ext cx="0" cy="0"/>
+          <a:chOff x="0" y="0"/>
+          <a:chExt cx="0" cy="0"/>
+        </a:xfrm>
+      </p:grpSpPr>
+      <p:sp>
+        <p:nvSpPr>
+          <p:cNvPr id="2" name="Slide Image Placeholder 1"/>
+          <p:cNvSpPr>
+            <a:spLocks noGrp="1" noRot="1" noChangeAspect="1"/>
+          </p:cNvSpPr>
+          <p:nvPr>
+            <p:ph type="sldImg"/>
+          </p:nvPr>
+        </p:nvSpPr>
+        <p:spPr/>
+      </p:sp>
+      <p:sp>
+        <p:nvSpPr>
+          <p:cNvPr id="3" name="Notes Placeholder 2"/>
+          <p:cNvSpPr>
+            <a:spLocks noGrp="1"/>
+          </p:cNvSpPr>
+          <p:nvPr>
+            <p:ph type="body" idx="1"/>
+          </p:nvPr>
+        </p:nvSpPr>
+        <p:spPr/>
+        <p:txBody>
+          <a:bodyPr/>
+          <a:lstStyle/>
+          <a:p>
+            <a:r>
+              <a:rPr lang="en-US" dirty="0"/>
+              <a:t/>
+            </a:r>
+            <a:endParaRPr lang="en-US" dirty="0"/>
+          </a:p>
+        </p:txBody>
+      </p:sp>
+      <p:sp>
+        <p:nvSpPr>
+          <p:cNvPr id="4" name="Slide Number Placeholder 3"/>
+          <p:cNvSpPr>
+            <a:spLocks noGrp="1"/>
+          </p:cNvSpPr>
+          <p:nvPr>
+            <p:ph type="sldNum" sz="quarter" idx="10"/>
+          </p:nvPr>
+        </p:nvSpPr>
+        <p:spPr/>
+        <p:txBody>
+          <a:bodyPr/>
+          <a:lstStyle/>
+          <a:p>
+            <a:fld id="{F7021451-1387-4CA6-816F-3879F97B5CBC}" type="slidenum">
+              <a:rPr lang="en-US"/>
+              <a:t>15</a:t>
+            </a:fld>
+            <a:endParaRPr lang="en-US"/>
+          </a:p>
+        </p:txBody>
+      </p:sp>
+    </p:spTree>
+    <p:extLst>
+      <p:ext uri="{BB962C8B-B14F-4D97-AF65-F5344CB8AC3E}">
+        <p14:creationId xmlns:p14="http://schemas.microsoft.com/office/powerpoint/2010/main" val="1024086991"/>
+      </p:ext>
+    </p:extLst>
+  </p:cSld>
+  <p:clrMapOvr>
+    <a:masterClrMapping/>
+  </p:clrMapOvr>
+</p:notes>
+</file>
+
+<file path=ppt/notesSlides/notesSlide16.xml><?xml version="1.0" encoding="utf-8"?>
+<p:notes xmlns:a="http://schemas.openxmlformats.org/drawingml/2006/main" xmlns:r="http://schemas.openxmlformats.org/officeDocument/2006/relationships" xmlns:p="http://schemas.openxmlformats.org/presentationml/2006/main">
+  <p:cSld>
+    <p:spTree>
+      <p:nvGrpSpPr>
+        <p:cNvPr id="1" name=""/>
+        <p:cNvGrpSpPr/>
+        <p:nvPr/>
+      </p:nvGrpSpPr>
+      <p:grpSpPr>
+        <a:xfrm>
+          <a:off x="0" y="0"/>
+          <a:ext cx="0" cy="0"/>
+          <a:chOff x="0" y="0"/>
+          <a:chExt cx="0" cy="0"/>
+        </a:xfrm>
+      </p:grpSpPr>
+      <p:sp>
+        <p:nvSpPr>
+          <p:cNvPr id="2" name="Slide Image Placeholder 1"/>
+          <p:cNvSpPr>
+            <a:spLocks noGrp="1" noRot="1" noChangeAspect="1"/>
+          </p:cNvSpPr>
+          <p:nvPr>
+            <p:ph type="sldImg"/>
+          </p:nvPr>
+        </p:nvSpPr>
+        <p:spPr/>
+      </p:sp>
+      <p:sp>
+        <p:nvSpPr>
+          <p:cNvPr id="3" name="Notes Placeholder 2"/>
+          <p:cNvSpPr>
+            <a:spLocks noGrp="1"/>
+          </p:cNvSpPr>
+          <p:nvPr>
+            <p:ph type="body" idx="1"/>
+          </p:nvPr>
+        </p:nvSpPr>
+        <p:spPr/>
+        <p:txBody>
+          <a:bodyPr/>
+          <a:lstStyle/>
+          <a:p>
+            <a:r>
+              <a:rPr lang="en-US" dirty="0"/>
+              <a:t/>
+            </a:r>
+            <a:endParaRPr lang="en-US" dirty="0"/>
+          </a:p>
+        </p:txBody>
+      </p:sp>
+      <p:sp>
+        <p:nvSpPr>
+          <p:cNvPr id="4" name="Slide Number Placeholder 3"/>
+          <p:cNvSpPr>
+            <a:spLocks noGrp="1"/>
+          </p:cNvSpPr>
+          <p:nvPr>
+            <p:ph type="sldNum" sz="quarter" idx="10"/>
+          </p:nvPr>
+        </p:nvSpPr>
+        <p:spPr/>
+        <p:txBody>
+          <a:bodyPr/>
+          <a:lstStyle/>
+          <a:p>
+            <a:fld id="{F7021451-1387-4CA6-816F-3879F97B5CBC}" type="slidenum">
+              <a:rPr lang="en-US"/>
+              <a:t>16</a:t>
+            </a:fld>
+            <a:endParaRPr lang="en-US"/>
+          </a:p>
+        </p:txBody>
+      </p:sp>
+    </p:spTree>
+    <p:extLst>
+      <p:ext uri="{BB962C8B-B14F-4D97-AF65-F5344CB8AC3E}">
+        <p14:creationId xmlns:p14="http://schemas.microsoft.com/office/powerpoint/2010/main" val="1024086991"/>
+      </p:ext>
+    </p:extLst>
+  </p:cSld>
+  <p:clrMapOvr>
+    <a:masterClrMapping/>
+  </p:clrMapOvr>
+</p:notes>
+</file>
+
+<file path=ppt/notesSlides/notesSlide17.xml><?xml version="1.0" encoding="utf-8"?>
+<p:notes xmlns:a="http://schemas.openxmlformats.org/drawingml/2006/main" xmlns:r="http://schemas.openxmlformats.org/officeDocument/2006/relationships" xmlns:p="http://schemas.openxmlformats.org/presentationml/2006/main">
+  <p:cSld>
+    <p:spTree>
+      <p:nvGrpSpPr>
+        <p:cNvPr id="1" name=""/>
+        <p:cNvGrpSpPr/>
+        <p:nvPr/>
+      </p:nvGrpSpPr>
+      <p:grpSpPr>
+        <a:xfrm>
+          <a:off x="0" y="0"/>
+          <a:ext cx="0" cy="0"/>
+          <a:chOff x="0" y="0"/>
+          <a:chExt cx="0" cy="0"/>
+        </a:xfrm>
+      </p:grpSpPr>
+      <p:sp>
+        <p:nvSpPr>
+          <p:cNvPr id="2" name="Slide Image Placeholder 1"/>
+          <p:cNvSpPr>
+            <a:spLocks noGrp="1" noRot="1" noChangeAspect="1"/>
+          </p:cNvSpPr>
+          <p:nvPr>
+            <p:ph type="sldImg"/>
+          </p:nvPr>
+        </p:nvSpPr>
+        <p:spPr/>
+      </p:sp>
+      <p:sp>
+        <p:nvSpPr>
+          <p:cNvPr id="3" name="Notes Placeholder 2"/>
+          <p:cNvSpPr>
+            <a:spLocks noGrp="1"/>
+          </p:cNvSpPr>
+          <p:nvPr>
+            <p:ph type="body" idx="1"/>
+          </p:nvPr>
+        </p:nvSpPr>
+        <p:spPr/>
+        <p:txBody>
+          <a:bodyPr/>
+          <a:lstStyle/>
+          <a:p>
+            <a:r>
+              <a:rPr lang="en-US" dirty="0"/>
+              <a:t/>
+            </a:r>
+            <a:endParaRPr lang="en-US" dirty="0"/>
+          </a:p>
+        </p:txBody>
+      </p:sp>
+      <p:sp>
+        <p:nvSpPr>
+          <p:cNvPr id="4" name="Slide Number Placeholder 3"/>
+          <p:cNvSpPr>
+            <a:spLocks noGrp="1"/>
+          </p:cNvSpPr>
+          <p:nvPr>
+            <p:ph type="sldNum" sz="quarter" idx="10"/>
+          </p:nvPr>
+        </p:nvSpPr>
+        <p:spPr/>
+        <p:txBody>
+          <a:bodyPr/>
+          <a:lstStyle/>
+          <a:p>
+            <a:fld id="{F7021451-1387-4CA6-816F-3879F97B5CBC}" type="slidenum">
+              <a:rPr lang="en-US"/>
+              <a:t>17</a:t>
             </a:fld>
             <a:endParaRPr lang="en-US"/>
           </a:p>
@@ -2189,102 +2545,6 @@
         </p:nvSpPr>
         <p:spPr>
           <a:xfrm>
-            <a:off x="406301" y="1223963"/>
-            <a:ext cx="8498026" cy="274290"/>
-          </a:xfrm>
-          <a:prstGeom prst="rect">
-            <a:avLst/>
-          </a:prstGeom>
-          <a:noFill/>
-          <a:ln/>
-        </p:spPr>
-        <p:txBody>
-          <a:bodyPr wrap="square" lIns="0" tIns="0" rIns="0" bIns="0" rtlCol="0" anchor="t"/>
-          <a:lstStyle/>
-          <a:p>
-            <a:pPr algn="l" indent="0" marL="0">
-              <a:lnSpc>
-                <a:spcPts val="2160"/>
-              </a:lnSpc>
-              <a:spcBef>
-                <a:spcPts val="600"/>
-              </a:spcBef>
-              <a:spcAft>
-                <a:spcPts val="800"/>
-              </a:spcAft>
-              <a:buNone/>
-            </a:pPr>
-            <a:r>
-              <a:rPr lang="en-US" sz="1800" b="1" dirty="0">
-                <a:solidFill>
-                  <a:srgbClr val="FE4447"/>
-                </a:solidFill>
-                <a:latin typeface="Georgia" pitchFamily="34" charset="0"/>
-                <a:ea typeface="Georgia" pitchFamily="34" charset="-122"/>
-                <a:cs typeface="Georgia" pitchFamily="34" charset="-120"/>
-              </a:rPr>
-              <a:t>Learning objective</a:t>
-            </a:r>
-            <a:endParaRPr lang="en-US" sz="1800" dirty="0"/>
-          </a:p>
-        </p:txBody>
-      </p:sp>
-      <p:sp>
-        <p:nvSpPr>
-          <p:cNvPr id="6" name="Text 4"/>
-          <p:cNvSpPr/>
-          <p:nvPr/>
-        </p:nvSpPr>
-        <p:spPr>
-          <a:xfrm>
-            <a:off x="406301" y="1637854"/>
-            <a:ext cx="8498026" cy="426541"/>
-          </a:xfrm>
-          <a:prstGeom prst="rect">
-            <a:avLst/>
-          </a:prstGeom>
-          <a:noFill/>
-          <a:ln/>
-        </p:spPr>
-        <p:txBody>
-          <a:bodyPr wrap="square" lIns="0" tIns="0" rIns="0" bIns="0" rtlCol="0" anchor="t"/>
-          <a:lstStyle/>
-          <a:p>
-            <a:pPr algn="l" indent="0" marL="0">
-              <a:lnSpc>
-                <a:spcPts val="1680"/>
-              </a:lnSpc>
-              <a:spcBef>
-                <a:spcPts val="300"/>
-              </a:spcBef>
-              <a:spcAft>
-                <a:spcPts val="300"/>
-              </a:spcAft>
-              <a:buNone/>
-            </a:pPr>
-            <a:r>
-              <a:rPr lang="en-US" sz="1200" dirty="0">
-                <a:solidFill>
-                  <a:srgbClr val="1C2833"/>
-                </a:solidFill>
-                <a:latin typeface="Arial" pitchFamily="34" charset="0"/>
-                <a:ea typeface="Arial" pitchFamily="34" charset="-122"/>
-                <a:cs typeface="Arial" pitchFamily="34" charset="-120"/>
-              </a:rPr>
-              <a:t>By the end of this lesson, students will classify at least 12 everyday objects by their dominant element and defend a classification where more than one element is present.</a:t>
-            </a:r>
-            <a:endParaRPr lang="en-US" sz="1200" dirty="0"/>
-          </a:p>
-        </p:txBody>
-      </p:sp>
-      <p:sp>
-        <p:nvSpPr>
-          <p:cNvPr id="7" name="Text 5"/>
-          <p:cNvSpPr/>
-          <p:nvPr/>
-        </p:nvSpPr>
-        <p:spPr>
-          <a:xfrm>
             <a:off x="406301" y="4434929"/>
             <a:ext cx="8498026" cy="213271"/>
           </a:xfrm>
@@ -2429,7 +2689,7 @@
                 <a:ea typeface="Georgia" pitchFamily="34" charset="-122"/>
                 <a:cs typeface="Georgia" pitchFamily="34" charset="-120"/>
               </a:rPr>
-              <a:t>Homework</a:t>
+              <a:t>Activity (25 min) — Element Sort (cont.)</a:t>
             </a:r>
             <a:endParaRPr lang="en-US" sz="1800" dirty="0"/>
           </a:p>
@@ -2443,8 +2703,8 @@
         </p:nvSpPr>
         <p:spPr>
           <a:xfrm>
-            <a:off x="406301" y="870942"/>
-            <a:ext cx="8498026" cy="426541"/>
+            <a:off x="634901" y="883593"/>
+            <a:ext cx="8102798" cy="769441"/>
           </a:xfrm>
           <a:prstGeom prst="rect">
             <a:avLst/>
@@ -2456,36 +2716,306 @@
           <a:bodyPr wrap="square" lIns="0" tIns="0" rIns="0" bIns="0" rtlCol="0" anchor="t"/>
           <a:lstStyle/>
           <a:p>
-            <a:pPr algn="l" indent="0" marL="0">
-              <a:lnSpc>
-                <a:spcPts val="1680"/>
-              </a:lnSpc>
-              <a:spcBef>
-                <a:spcPts val="300"/>
-              </a:spcBef>
-              <a:spcAft>
-                <a:spcPts val="300"/>
-              </a:spcAft>
-              <a:buNone/>
-            </a:pPr>
-            <a:r>
-              <a:rPr lang="en-US" sz="1200" dirty="0">
-                <a:solidFill>
-                  <a:srgbClr val="1C2833"/>
-                </a:solidFill>
-                <a:latin typeface="Arial" pitchFamily="34" charset="0"/>
-                <a:ea typeface="Arial" pitchFamily="34" charset="-122"/>
-                <a:cs typeface="Arial" pitchFamily="34" charset="-120"/>
-              </a:rPr>
-              <a:t>– No new homework. (Spend the freed time finalising the project pair or topic — partners and projects are confirmed by Day 5.)</a:t>
+            <a:pPr algn="l" marL="342900" indent="-342900">
+              <a:lnSpc>
+                <a:spcPts val="1620"/>
+              </a:lnSpc>
+              <a:spcAft>
+                <a:spcPts val="300"/>
+              </a:spcAft>
+              <a:buSzPct val="100000"/>
+              <a:buChar char="•"/>
+            </a:pPr>
+            <a:r>
+              <a:rPr lang="en-US" sz="1200" dirty="0">
+                <a:solidFill>
+                  <a:srgbClr val="1C2833"/>
+                </a:solidFill>
+                <a:latin typeface="Arial" pitchFamily="34" charset="0"/>
+                <a:ea typeface="Arial" pitchFamily="34" charset="-122"/>
+                <a:cs typeface="Arial" pitchFamily="34" charset="-120"/>
+              </a:rPr>
+              <a:t>Students work in </a:t>
+            </a:r>
+            <a:pPr algn="l" indent="0" marL="0">
+              <a:lnSpc>
+                <a:spcPts val="1620"/>
+              </a:lnSpc>
+              <a:spcAft>
+                <a:spcPts val="300"/>
+              </a:spcAft>
+              <a:buNone/>
+            </a:pPr>
+            <a:r>
+              <a:rPr lang="en-US" sz="1200" b="1" dirty="0">
+                <a:solidFill>
+                  <a:srgbClr val="1C2833"/>
+                </a:solidFill>
+                <a:latin typeface="Arial" pitchFamily="34" charset="0"/>
+                <a:ea typeface="Arial" pitchFamily="34" charset="-122"/>
+                <a:cs typeface="Arial" pitchFamily="34" charset="-120"/>
+              </a:rPr>
+              <a:t>pairs</a:t>
+            </a:r>
+            <a:pPr algn="l" indent="0" marL="0">
+              <a:lnSpc>
+                <a:spcPts val="1620"/>
+              </a:lnSpc>
+              <a:spcAft>
+                <a:spcPts val="300"/>
+              </a:spcAft>
+              <a:buNone/>
+            </a:pPr>
+            <a:r>
+              <a:rPr lang="en-US" sz="1200" dirty="0">
+                <a:solidFill>
+                  <a:srgbClr val="1C2833"/>
+                </a:solidFill>
+                <a:latin typeface="Arial" pitchFamily="34" charset="0"/>
+                <a:ea typeface="Arial" pitchFamily="34" charset="-122"/>
+                <a:cs typeface="Arial" pitchFamily="34" charset="-120"/>
+              </a:rPr>
+              <a:t>.</a:t>
             </a:r>
             <a:endParaRPr lang="en-US" sz="1200" dirty="0"/>
           </a:p>
+          <a:p>
+            <a:pPr algn="l" marL="342900" indent="-342900">
+              <a:lnSpc>
+                <a:spcPts val="1620"/>
+              </a:lnSpc>
+              <a:spcAft>
+                <a:spcPts val="300"/>
+              </a:spcAft>
+              <a:buSzPct val="100000"/>
+              <a:buChar char="•"/>
+            </a:pPr>
+            <a:r>
+              <a:rPr lang="en-US" sz="1200" dirty="0">
+                <a:solidFill>
+                  <a:srgbClr val="1C2833"/>
+                </a:solidFill>
+                <a:latin typeface="Arial" pitchFamily="34" charset="0"/>
+                <a:ea typeface="Arial" pitchFamily="34" charset="-122"/>
+                <a:cs typeface="Arial" pitchFamily="34" charset="-120"/>
+              </a:rPr>
+              <a:t>Each pair places their 3 home-objects + 2 teacher-supplied objects on the right element tray. (5 objects per pair.)</a:t>
+            </a:r>
+            <a:endParaRPr lang="en-US" sz="1200" dirty="0"/>
+          </a:p>
+          <a:p>
+            <a:pPr algn="l" marL="342900" indent="-342900">
+              <a:lnSpc>
+                <a:spcPts val="1620"/>
+              </a:lnSpc>
+              <a:spcAft>
+                <a:spcPts val="300"/>
+              </a:spcAft>
+              <a:buSzPct val="100000"/>
+              <a:buChar char="•"/>
+            </a:pPr>
+            <a:r>
+              <a:rPr lang="en-US" sz="1200" dirty="0">
+                <a:solidFill>
+                  <a:srgbClr val="1C2833"/>
+                </a:solidFill>
+                <a:latin typeface="Arial" pitchFamily="34" charset="0"/>
+                <a:ea typeface="Arial" pitchFamily="34" charset="-122"/>
+                <a:cs typeface="Arial" pitchFamily="34" charset="-120"/>
+              </a:rPr>
+              <a:t>For each object, they fill the worksheet table:</a:t>
+            </a:r>
+            <a:endParaRPr lang="en-US" sz="1200" dirty="0"/>
+          </a:p>
         </p:txBody>
       </p:sp>
       <p:sp>
         <p:nvSpPr>
           <p:cNvPr id="5" name="Text 3"/>
+          <p:cNvSpPr/>
+          <p:nvPr/>
+        </p:nvSpPr>
+        <p:spPr>
+          <a:xfrm>
+            <a:off x="634901" y="1754535"/>
+            <a:ext cx="8102798" cy="1013222"/>
+          </a:xfrm>
+          <a:prstGeom prst="rect">
+            <a:avLst/>
+          </a:prstGeom>
+          <a:noFill/>
+          <a:ln/>
+        </p:spPr>
+        <p:txBody>
+          <a:bodyPr wrap="square" lIns="0" tIns="0" rIns="0" bIns="0" rtlCol="0" anchor="t"/>
+          <a:lstStyle/>
+          <a:p>
+            <a:pPr algn="l" marL="342900" indent="-342900">
+              <a:lnSpc>
+                <a:spcPts val="1620"/>
+              </a:lnSpc>
+              <a:spcAft>
+                <a:spcPts val="300"/>
+              </a:spcAft>
+              <a:buSzPct val="100000"/>
+              <a:buChar char="•"/>
+            </a:pPr>
+            <a:r>
+              <a:rPr lang="en-US" sz="1200" dirty="0">
+                <a:solidFill>
+                  <a:srgbClr val="1C2833"/>
+                </a:solidFill>
+                <a:latin typeface="Arial" pitchFamily="34" charset="0"/>
+                <a:ea typeface="Arial" pitchFamily="34" charset="-122"/>
+                <a:cs typeface="Arial" pitchFamily="34" charset="-120"/>
+              </a:rPr>
+              <a:t>Object name</a:t>
+            </a:r>
+            <a:endParaRPr lang="en-US" sz="1200" dirty="0"/>
+          </a:p>
+          <a:p>
+            <a:pPr algn="l" marL="342900" indent="-342900">
+              <a:lnSpc>
+                <a:spcPts val="1620"/>
+              </a:lnSpc>
+              <a:spcAft>
+                <a:spcPts val="300"/>
+              </a:spcAft>
+              <a:buSzPct val="100000"/>
+              <a:buChar char="•"/>
+            </a:pPr>
+            <a:r>
+              <a:rPr lang="en-US" sz="1200" dirty="0">
+                <a:solidFill>
+                  <a:srgbClr val="1C2833"/>
+                </a:solidFill>
+                <a:latin typeface="Arial" pitchFamily="34" charset="0"/>
+                <a:ea typeface="Arial" pitchFamily="34" charset="-122"/>
+                <a:cs typeface="Arial" pitchFamily="34" charset="-120"/>
+              </a:rPr>
+              <a:t>Dominant element</a:t>
+            </a:r>
+            <a:endParaRPr lang="en-US" sz="1200" dirty="0"/>
+          </a:p>
+          <a:p>
+            <a:pPr algn="l" marL="342900" indent="-342900">
+              <a:lnSpc>
+                <a:spcPts val="1620"/>
+              </a:lnSpc>
+              <a:spcAft>
+                <a:spcPts val="300"/>
+              </a:spcAft>
+              <a:buSzPct val="100000"/>
+              <a:buChar char="•"/>
+            </a:pPr>
+            <a:r>
+              <a:rPr lang="en-US" sz="1200" dirty="0">
+                <a:solidFill>
+                  <a:srgbClr val="1C2833"/>
+                </a:solidFill>
+                <a:latin typeface="Arial" pitchFamily="34" charset="0"/>
+                <a:ea typeface="Arial" pitchFamily="34" charset="-122"/>
+                <a:cs typeface="Arial" pitchFamily="34" charset="-120"/>
+              </a:rPr>
+              <a:t>Other elements present (1–4 more)</a:t>
+            </a:r>
+            <a:endParaRPr lang="en-US" sz="1200" dirty="0"/>
+          </a:p>
+          <a:p>
+            <a:pPr algn="l" marL="342900" indent="-342900">
+              <a:lnSpc>
+                <a:spcPts val="1620"/>
+              </a:lnSpc>
+              <a:spcAft>
+                <a:spcPts val="300"/>
+              </a:spcAft>
+              <a:buSzPct val="100000"/>
+              <a:buChar char="•"/>
+            </a:pPr>
+            <a:r>
+              <a:rPr lang="en-US" sz="1200" dirty="0">
+                <a:solidFill>
+                  <a:srgbClr val="1C2833"/>
+                </a:solidFill>
+                <a:latin typeface="Arial" pitchFamily="34" charset="0"/>
+                <a:ea typeface="Arial" pitchFamily="34" charset="-122"/>
+                <a:cs typeface="Arial" pitchFamily="34" charset="-120"/>
+              </a:rPr>
+              <a:t>Strongest tanmātra</a:t>
+            </a:r>
+            <a:endParaRPr lang="en-US" sz="1200" dirty="0"/>
+          </a:p>
+        </p:txBody>
+      </p:sp>
+      <p:sp>
+        <p:nvSpPr>
+          <p:cNvPr id="6" name="Text 4"/>
+          <p:cNvSpPr/>
+          <p:nvPr/>
+        </p:nvSpPr>
+        <p:spPr>
+          <a:xfrm>
+            <a:off x="634901" y="2869257"/>
+            <a:ext cx="8102798" cy="487561"/>
+          </a:xfrm>
+          <a:prstGeom prst="rect">
+            <a:avLst/>
+          </a:prstGeom>
+          <a:noFill/>
+          <a:ln/>
+        </p:spPr>
+        <p:txBody>
+          <a:bodyPr wrap="square" lIns="0" tIns="0" rIns="0" bIns="0" rtlCol="0" anchor="t"/>
+          <a:lstStyle/>
+          <a:p>
+            <a:pPr algn="l" marL="342900" indent="-342900">
+              <a:lnSpc>
+                <a:spcPts val="1620"/>
+              </a:lnSpc>
+              <a:spcAft>
+                <a:spcPts val="300"/>
+              </a:spcAft>
+              <a:buSzPct val="100000"/>
+              <a:buChar char="•"/>
+            </a:pPr>
+            <a:r>
+              <a:rPr lang="en-US" sz="1200" b="1" dirty="0">
+                <a:solidFill>
+                  <a:srgbClr val="1C2833"/>
+                </a:solidFill>
+                <a:latin typeface="Arial" pitchFamily="34" charset="0"/>
+                <a:ea typeface="Arial" pitchFamily="34" charset="-122"/>
+                <a:cs typeface="Arial" pitchFamily="34" charset="-120"/>
+              </a:rPr>
+              <a:t>Gallery walk (5 min within the 25):</a:t>
+            </a:r>
+            <a:pPr algn="l" indent="0" marL="0">
+              <a:lnSpc>
+                <a:spcPts val="1620"/>
+              </a:lnSpc>
+              <a:spcAft>
+                <a:spcPts val="300"/>
+              </a:spcAft>
+              <a:buNone/>
+            </a:pPr>
+            <a:r>
+              <a:rPr lang="en-US" sz="1200" dirty="0">
+                <a:solidFill>
+                  <a:srgbClr val="1C2833"/>
+                </a:solidFill>
+                <a:latin typeface="Arial" pitchFamily="34" charset="0"/>
+                <a:ea typeface="Arial" pitchFamily="34" charset="-122"/>
+                <a:cs typeface="Arial" pitchFamily="34" charset="-120"/>
+              </a:rPr>
+              <a:t> pairs visit two other pairs' trays and put a sticky note where they disagree, explaining briefly.</a:t>
+            </a:r>
+            <a:endParaRPr lang="en-US" sz="1200" dirty="0"/>
+          </a:p>
+        </p:txBody>
+      </p:sp>
+      <p:sp>
+        <p:nvSpPr>
+          <p:cNvPr id="7" name="Text 5"/>
           <p:cNvSpPr/>
           <p:nvPr/>
         </p:nvSpPr>
@@ -2635,7 +3165,7 @@
                 <a:ea typeface="Georgia" pitchFamily="34" charset="-122"/>
                 <a:cs typeface="Georgia" pitchFamily="34" charset="-120"/>
               </a:rPr>
-              <a:t>Differentiation</a:t>
+              <a:t>Wrap-up (5 min)</a:t>
             </a:r>
             <a:endParaRPr lang="en-US" sz="1800" dirty="0"/>
           </a:p>
@@ -2650,7 +3180,7 @@
         <p:spPr>
           <a:xfrm>
             <a:off x="634901" y="883593"/>
-            <a:ext cx="8102798" cy="937022"/>
+            <a:ext cx="8102798" cy="525661"/>
           </a:xfrm>
           <a:prstGeom prst="rect">
             <a:avLst/>
@@ -2673,75 +3203,35 @@
               <a:buChar char="•"/>
             </a:pPr>
             <a:r>
-              <a:rPr lang="en-US" sz="1200" b="1" dirty="0">
-                <a:solidFill>
-                  <a:srgbClr val="1C2833"/>
-                </a:solidFill>
-                <a:latin typeface="Arial" pitchFamily="34" charset="0"/>
-                <a:ea typeface="Arial" pitchFamily="34" charset="-122"/>
-                <a:cs typeface="Arial" pitchFamily="34" charset="-120"/>
-              </a:rPr>
-              <a:t>One tier up:</a:t>
-            </a:r>
-            <a:pPr algn="l" indent="0" marL="0">
-              <a:lnSpc>
-                <a:spcPts val="1620"/>
-              </a:lnSpc>
-              <a:spcAft>
-                <a:spcPts val="300"/>
-              </a:spcAft>
-              <a:buNone/>
-            </a:pPr>
-            <a:r>
-              <a:rPr lang="en-US" sz="1200" dirty="0">
-                <a:solidFill>
-                  <a:srgbClr val="1C2833"/>
-                </a:solidFill>
-                <a:latin typeface="Arial" pitchFamily="34" charset="0"/>
-                <a:ea typeface="Arial" pitchFamily="34" charset="-122"/>
-                <a:cs typeface="Arial" pitchFamily="34" charset="-120"/>
-              </a:rPr>
-              <a:t> After sorting, pick the </a:t>
-            </a:r>
-            <a:pPr algn="l" indent="0" marL="0">
-              <a:lnSpc>
-                <a:spcPts val="1620"/>
-              </a:lnSpc>
-              <a:spcAft>
-                <a:spcPts val="300"/>
-              </a:spcAft>
-              <a:buNone/>
-            </a:pPr>
-            <a:r>
-              <a:rPr lang="en-US" sz="1200" b="1" dirty="0">
-                <a:solidFill>
-                  <a:srgbClr val="1C2833"/>
-                </a:solidFill>
-                <a:latin typeface="Arial" pitchFamily="34" charset="0"/>
-                <a:ea typeface="Arial" pitchFamily="34" charset="-122"/>
-                <a:cs typeface="Arial" pitchFamily="34" charset="-120"/>
-              </a:rPr>
-              <a:t>single most "mixed"</a:t>
-            </a:r>
-            <a:pPr algn="l" indent="0" marL="0">
-              <a:lnSpc>
-                <a:spcPts val="1620"/>
-              </a:lnSpc>
-              <a:spcAft>
-                <a:spcPts val="300"/>
-              </a:spcAft>
-              <a:buNone/>
-            </a:pPr>
-            <a:r>
-              <a:rPr lang="en-US" sz="1200" dirty="0">
-                <a:solidFill>
-                  <a:srgbClr val="1C2833"/>
-                </a:solidFill>
-                <a:latin typeface="Arial" pitchFamily="34" charset="0"/>
-                <a:ea typeface="Arial" pitchFamily="34" charset="-122"/>
-                <a:cs typeface="Arial" pitchFamily="34" charset="-120"/>
-              </a:rPr>
-              <a:t> object and write a paragraph explaining the proportions you'd assign each of the five elements within it.</a:t>
+              <a:rPr lang="en-US" sz="1200" dirty="0">
+                <a:solidFill>
+                  <a:srgbClr val="1C2833"/>
+                </a:solidFill>
+                <a:latin typeface="Arial" pitchFamily="34" charset="0"/>
+                <a:ea typeface="Arial" pitchFamily="34" charset="-122"/>
+                <a:cs typeface="Arial" pitchFamily="34" charset="-120"/>
+              </a:rPr>
+              <a:t>Discussion question, open to the room: </a:t>
+            </a:r>
+            <a:pPr algn="l" indent="0" marL="0">
+              <a:lnSpc>
+                <a:spcPts val="1620"/>
+              </a:lnSpc>
+              <a:spcAft>
+                <a:spcPts val="300"/>
+              </a:spcAft>
+              <a:buNone/>
+            </a:pPr>
+            <a:r>
+              <a:rPr lang="en-US" sz="1200" i="1" dirty="0">
+                <a:solidFill>
+                  <a:srgbClr val="1C2833"/>
+                </a:solidFill>
+                <a:latin typeface="Arial" pitchFamily="34" charset="0"/>
+                <a:ea typeface="Arial" pitchFamily="34" charset="-122"/>
+                <a:cs typeface="Arial" pitchFamily="34" charset="-120"/>
+              </a:rPr>
+              <a:t>"Which object was the hardest to classify, and why?"</a:t>
             </a:r>
             <a:endParaRPr lang="en-US" sz="1200" dirty="0"/>
           </a:p>
@@ -2757,155 +3247,15 @@
               <a:buChar char="•"/>
             </a:pPr>
             <a:r>
-              <a:rPr lang="en-US" sz="1200" b="1" dirty="0">
-                <a:solidFill>
-                  <a:srgbClr val="1C2833"/>
-                </a:solidFill>
-                <a:latin typeface="Arial" pitchFamily="34" charset="0"/>
-                <a:ea typeface="Arial" pitchFamily="34" charset="-122"/>
-                <a:cs typeface="Arial" pitchFamily="34" charset="-120"/>
-              </a:rPr>
-              <a:t>One tier down:</a:t>
-            </a:r>
-            <a:pPr algn="l" indent="0" marL="0">
-              <a:lnSpc>
-                <a:spcPts val="1620"/>
-              </a:lnSpc>
-              <a:spcAft>
-                <a:spcPts val="300"/>
-              </a:spcAft>
-              <a:buNone/>
-            </a:pPr>
-            <a:r>
-              <a:rPr lang="en-US" sz="1200" dirty="0">
-                <a:solidFill>
-                  <a:srgbClr val="1C2833"/>
-                </a:solidFill>
-                <a:latin typeface="Arial" pitchFamily="34" charset="0"/>
-                <a:ea typeface="Arial" pitchFamily="34" charset="-122"/>
-                <a:cs typeface="Arial" pitchFamily="34" charset="-120"/>
-              </a:rPr>
-              <a:t> If five categories feel hard, sort first into THREE — </a:t>
-            </a:r>
-            <a:pPr algn="l" indent="0" marL="0">
-              <a:lnSpc>
-                <a:spcPts val="1620"/>
-              </a:lnSpc>
-              <a:spcAft>
-                <a:spcPts val="300"/>
-              </a:spcAft>
-              <a:buNone/>
-            </a:pPr>
-            <a:r>
-              <a:rPr lang="en-US" sz="1200" i="1" dirty="0">
-                <a:solidFill>
-                  <a:srgbClr val="1C2833"/>
-                </a:solidFill>
-                <a:latin typeface="Arial" pitchFamily="34" charset="0"/>
-                <a:ea typeface="Arial" pitchFamily="34" charset="-122"/>
-                <a:cs typeface="Arial" pitchFamily="34" charset="-120"/>
-              </a:rPr>
-              <a:t>pṛthvī, ap, vāyu</a:t>
-            </a:r>
-            <a:pPr algn="l" indent="0" marL="0">
-              <a:lnSpc>
-                <a:spcPts val="1620"/>
-              </a:lnSpc>
-              <a:spcAft>
-                <a:spcPts val="300"/>
-              </a:spcAft>
-              <a:buNone/>
-            </a:pPr>
-            <a:r>
-              <a:rPr lang="en-US" sz="1200" dirty="0">
-                <a:solidFill>
-                  <a:srgbClr val="1C2833"/>
-                </a:solidFill>
-                <a:latin typeface="Arial" pitchFamily="34" charset="0"/>
-                <a:ea typeface="Arial" pitchFamily="34" charset="-122"/>
-                <a:cs typeface="Arial" pitchFamily="34" charset="-120"/>
-              </a:rPr>
-              <a:t> — then come back and consider where </a:t>
-            </a:r>
-            <a:pPr algn="l" indent="0" marL="0">
-              <a:lnSpc>
-                <a:spcPts val="1620"/>
-              </a:lnSpc>
-              <a:spcAft>
-                <a:spcPts val="300"/>
-              </a:spcAft>
-              <a:buNone/>
-            </a:pPr>
-            <a:r>
-              <a:rPr lang="en-US" sz="1200" i="1" dirty="0">
-                <a:solidFill>
-                  <a:srgbClr val="1C2833"/>
-                </a:solidFill>
-                <a:latin typeface="Arial" pitchFamily="34" charset="0"/>
-                <a:ea typeface="Arial" pitchFamily="34" charset="-122"/>
-                <a:cs typeface="Arial" pitchFamily="34" charset="-120"/>
-              </a:rPr>
-              <a:t>tejas</a:t>
-            </a:r>
-            <a:pPr algn="l" indent="0" marL="0">
-              <a:lnSpc>
-                <a:spcPts val="1620"/>
-              </a:lnSpc>
-              <a:spcAft>
-                <a:spcPts val="300"/>
-              </a:spcAft>
-              <a:buNone/>
-            </a:pPr>
-            <a:r>
-              <a:rPr lang="en-US" sz="1200" dirty="0">
-                <a:solidFill>
-                  <a:srgbClr val="1C2833"/>
-                </a:solidFill>
-                <a:latin typeface="Arial" pitchFamily="34" charset="0"/>
-                <a:ea typeface="Arial" pitchFamily="34" charset="-122"/>
-                <a:cs typeface="Arial" pitchFamily="34" charset="-120"/>
-              </a:rPr>
-              <a:t> or </a:t>
-            </a:r>
-            <a:pPr algn="l" indent="0" marL="0">
-              <a:lnSpc>
-                <a:spcPts val="1620"/>
-              </a:lnSpc>
-              <a:spcAft>
-                <a:spcPts val="300"/>
-              </a:spcAft>
-              <a:buNone/>
-            </a:pPr>
-            <a:r>
-              <a:rPr lang="en-US" sz="1200" i="1" dirty="0">
-                <a:solidFill>
-                  <a:srgbClr val="1C2833"/>
-                </a:solidFill>
-                <a:latin typeface="Arial" pitchFamily="34" charset="0"/>
-                <a:ea typeface="Arial" pitchFamily="34" charset="-122"/>
-                <a:cs typeface="Arial" pitchFamily="34" charset="-120"/>
-              </a:rPr>
-              <a:t>ākāśa</a:t>
-            </a:r>
-            <a:pPr algn="l" indent="0" marL="0">
-              <a:lnSpc>
-                <a:spcPts val="1620"/>
-              </a:lnSpc>
-              <a:spcAft>
-                <a:spcPts val="300"/>
-              </a:spcAft>
-              <a:buNone/>
-            </a:pPr>
-            <a:r>
-              <a:rPr lang="en-US" sz="1200" dirty="0">
-                <a:solidFill>
-                  <a:srgbClr val="1C2833"/>
-                </a:solidFill>
-                <a:latin typeface="Arial" pitchFamily="34" charset="0"/>
-                <a:ea typeface="Arial" pitchFamily="34" charset="-122"/>
-                <a:cs typeface="Arial" pitchFamily="34" charset="-120"/>
-              </a:rPr>
-              <a:t> should be added.</a:t>
+              <a:rPr lang="en-US" sz="1200" dirty="0">
+                <a:solidFill>
+                  <a:srgbClr val="1C2833"/>
+                </a:solidFill>
+                <a:latin typeface="Arial" pitchFamily="34" charset="0"/>
+                <a:ea typeface="Arial" pitchFamily="34" charset="-122"/>
+                <a:cs typeface="Arial" pitchFamily="34" charset="-120"/>
+              </a:rPr>
+              <a:t>Preview Day 5: a mid-module check + an extended reflection.</a:t>
             </a:r>
             <a:endParaRPr lang="en-US" sz="1200" dirty="0"/>
           </a:p>
@@ -3063,7 +3413,7 @@
                 <a:ea typeface="Georgia" pitchFamily="34" charset="-122"/>
                 <a:cs typeface="Georgia" pitchFamily="34" charset="-120"/>
               </a:rPr>
-              <a:t>Teacher notes</a:t>
+              <a:t>Student-facing content</a:t>
             </a:r>
             <a:endParaRPr lang="en-US" sz="1800" dirty="0"/>
           </a:p>
@@ -3078,7 +3428,7 @@
         <p:spPr>
           <a:xfrm>
             <a:off x="406301" y="870942"/>
-            <a:ext cx="8498026" cy="1279624"/>
+            <a:ext cx="8498026" cy="222796"/>
           </a:xfrm>
           <a:prstGeom prst="rect">
             <a:avLst/>
@@ -3111,7 +3461,7 @@
                 <a:ea typeface="Arial" pitchFamily="34" charset="-122"/>
                 <a:cs typeface="Arial" pitchFamily="34" charset="-120"/>
               </a:rPr>
-              <a:t>– This activity often surfaces interesting disagreements between students who classify the same object differently. </a:t>
+              <a:t>(The activity sheet is the student-facing content — see </a:t>
             </a:r>
             <a:pPr algn="l" indent="0" marL="0">
               <a:lnSpc>
@@ -3126,15 +3476,15 @@
               <a:buNone/>
             </a:pPr>
             <a:r>
-              <a:rPr lang="en-US" sz="1200" b="1" dirty="0">
-                <a:solidFill>
-                  <a:srgbClr val="1C2833"/>
-                </a:solidFill>
-                <a:latin typeface="Arial" pitchFamily="34" charset="0"/>
-                <a:ea typeface="Arial" pitchFamily="34" charset="-122"/>
-                <a:cs typeface="Arial" pitchFamily="34" charset="-120"/>
-              </a:rPr>
-              <a:t>Don't resolve the disagreements quickly</a:t>
+              <a:rPr lang="en-US" sz="1200" dirty="0">
+                <a:solidFill>
+                  <a:srgbClr val="1C2833"/>
+                </a:solidFill>
+                <a:latin typeface="Arial" pitchFamily="34" charset="0"/>
+                <a:ea typeface="Arial" pitchFamily="34" charset="-122"/>
+                <a:cs typeface="Arial" pitchFamily="34" charset="-120"/>
+              </a:rPr>
+              <a:t>activities/activity-01-element-sort.md</a:t>
             </a:r>
             <a:pPr algn="l" indent="0" marL="0">
               <a:lnSpc>
@@ -3157,191 +3507,7 @@
                 <a:ea typeface="Arial" pitchFamily="34" charset="-122"/>
                 <a:cs typeface="Arial" pitchFamily="34" charset="-120"/>
               </a:rPr>
-              <a:t> — let them argue it out. The reasoning is more important than the answer. – A common dispute: where does a "balloon filled with air" go? </a:t>
-            </a:r>
-            <a:pPr algn="l" indent="0" marL="0">
-              <a:lnSpc>
-                <a:spcPts val="1680"/>
-              </a:lnSpc>
-              <a:spcBef>
-                <a:spcPts val="300"/>
-              </a:spcBef>
-              <a:spcAft>
-                <a:spcPts val="300"/>
-              </a:spcAft>
-              <a:buNone/>
-            </a:pPr>
-            <a:r>
-              <a:rPr lang="en-US" sz="1200" i="1" dirty="0">
-                <a:solidFill>
-                  <a:srgbClr val="1C2833"/>
-                </a:solidFill>
-                <a:latin typeface="Arial" pitchFamily="34" charset="0"/>
-                <a:ea typeface="Arial" pitchFamily="34" charset="-122"/>
-                <a:cs typeface="Arial" pitchFamily="34" charset="-120"/>
-              </a:rPr>
-              <a:t>Vāyu</a:t>
-            </a:r>
-            <a:pPr algn="l" indent="0" marL="0">
-              <a:lnSpc>
-                <a:spcPts val="1680"/>
-              </a:lnSpc>
-              <a:spcBef>
-                <a:spcPts val="300"/>
-              </a:spcBef>
-              <a:spcAft>
-                <a:spcPts val="300"/>
-              </a:spcAft>
-              <a:buNone/>
-            </a:pPr>
-            <a:r>
-              <a:rPr lang="en-US" sz="1200" dirty="0">
-                <a:solidFill>
-                  <a:srgbClr val="1C2833"/>
-                </a:solidFill>
-                <a:latin typeface="Arial" pitchFamily="34" charset="0"/>
-                <a:ea typeface="Arial" pitchFamily="34" charset="-122"/>
-                <a:cs typeface="Arial" pitchFamily="34" charset="-120"/>
-              </a:rPr>
-              <a:t> because the </a:t>
-            </a:r>
-            <a:pPr algn="l" indent="0" marL="0">
-              <a:lnSpc>
-                <a:spcPts val="1680"/>
-              </a:lnSpc>
-              <a:spcBef>
-                <a:spcPts val="300"/>
-              </a:spcBef>
-              <a:spcAft>
-                <a:spcPts val="300"/>
-              </a:spcAft>
-              <a:buNone/>
-            </a:pPr>
-            <a:r>
-              <a:rPr lang="en-US" sz="1200" i="1" dirty="0">
-                <a:solidFill>
-                  <a:srgbClr val="1C2833"/>
-                </a:solidFill>
-                <a:latin typeface="Arial" pitchFamily="34" charset="0"/>
-                <a:ea typeface="Arial" pitchFamily="34" charset="-122"/>
-                <a:cs typeface="Arial" pitchFamily="34" charset="-120"/>
-              </a:rPr>
-              <a:t>content</a:t>
-            </a:r>
-            <a:pPr algn="l" indent="0" marL="0">
-              <a:lnSpc>
-                <a:spcPts val="1680"/>
-              </a:lnSpc>
-              <a:spcBef>
-                <a:spcPts val="300"/>
-              </a:spcBef>
-              <a:spcAft>
-                <a:spcPts val="300"/>
-              </a:spcAft>
-              <a:buNone/>
-            </a:pPr>
-            <a:r>
-              <a:rPr lang="en-US" sz="1200" dirty="0">
-                <a:solidFill>
-                  <a:srgbClr val="1C2833"/>
-                </a:solidFill>
-                <a:latin typeface="Arial" pitchFamily="34" charset="0"/>
-                <a:ea typeface="Arial" pitchFamily="34" charset="-122"/>
-                <a:cs typeface="Arial" pitchFamily="34" charset="-120"/>
-              </a:rPr>
-              <a:t> is air? Or </a:t>
-            </a:r>
-            <a:pPr algn="l" indent="0" marL="0">
-              <a:lnSpc>
-                <a:spcPts val="1680"/>
-              </a:lnSpc>
-              <a:spcBef>
-                <a:spcPts val="300"/>
-              </a:spcBef>
-              <a:spcAft>
-                <a:spcPts val="300"/>
-              </a:spcAft>
-              <a:buNone/>
-            </a:pPr>
-            <a:r>
-              <a:rPr lang="en-US" sz="1200" i="1" dirty="0">
-                <a:solidFill>
-                  <a:srgbClr val="1C2833"/>
-                </a:solidFill>
-                <a:latin typeface="Arial" pitchFamily="34" charset="0"/>
-                <a:ea typeface="Arial" pitchFamily="34" charset="-122"/>
-                <a:cs typeface="Arial" pitchFamily="34" charset="-120"/>
-              </a:rPr>
-              <a:t>pṛthvī</a:t>
-            </a:r>
-            <a:pPr algn="l" indent="0" marL="0">
-              <a:lnSpc>
-                <a:spcPts val="1680"/>
-              </a:lnSpc>
-              <a:spcBef>
-                <a:spcPts val="300"/>
-              </a:spcBef>
-              <a:spcAft>
-                <a:spcPts val="300"/>
-              </a:spcAft>
-              <a:buNone/>
-            </a:pPr>
-            <a:r>
-              <a:rPr lang="en-US" sz="1200" dirty="0">
-                <a:solidFill>
-                  <a:srgbClr val="1C2833"/>
-                </a:solidFill>
-                <a:latin typeface="Arial" pitchFamily="34" charset="0"/>
-                <a:ea typeface="Arial" pitchFamily="34" charset="-122"/>
-                <a:cs typeface="Arial" pitchFamily="34" charset="-120"/>
-              </a:rPr>
-              <a:t> because the </a:t>
-            </a:r>
-            <a:pPr algn="l" indent="0" marL="0">
-              <a:lnSpc>
-                <a:spcPts val="1680"/>
-              </a:lnSpc>
-              <a:spcBef>
-                <a:spcPts val="300"/>
-              </a:spcBef>
-              <a:spcAft>
-                <a:spcPts val="300"/>
-              </a:spcAft>
-              <a:buNone/>
-            </a:pPr>
-            <a:r>
-              <a:rPr lang="en-US" sz="1200" i="1" dirty="0">
-                <a:solidFill>
-                  <a:srgbClr val="1C2833"/>
-                </a:solidFill>
-                <a:latin typeface="Arial" pitchFamily="34" charset="0"/>
-                <a:ea typeface="Arial" pitchFamily="34" charset="-122"/>
-                <a:cs typeface="Arial" pitchFamily="34" charset="-120"/>
-              </a:rPr>
-              <a:t>balloon material</a:t>
-            </a:r>
-            <a:pPr algn="l" indent="0" marL="0">
-              <a:lnSpc>
-                <a:spcPts val="1680"/>
-              </a:lnSpc>
-              <a:spcBef>
-                <a:spcPts val="300"/>
-              </a:spcBef>
-              <a:spcAft>
-                <a:spcPts val="300"/>
-              </a:spcAft>
-              <a:buNone/>
-            </a:pPr>
-            <a:r>
-              <a:rPr lang="en-US" sz="1200" dirty="0">
-                <a:solidFill>
-                  <a:srgbClr val="1C2833"/>
-                </a:solidFill>
-                <a:latin typeface="Arial" pitchFamily="34" charset="0"/>
-                <a:ea typeface="Arial" pitchFamily="34" charset="-122"/>
-                <a:cs typeface="Arial" pitchFamily="34" charset="-120"/>
-              </a:rPr>
-              <a:t> is rubber (a solid)? Both are defensible — push students to articulate which one is "dominant." – Look for students who are insisting on a single rigid answer. They are missing the lesson — gently steer toward "and what's the next-strongest element here?" – Photograph any especially good or disputed sorting choices; reuse on Day 7 group discussion.</a:t>
+              <a:t>.)</a:t>
             </a:r>
             <a:endParaRPr lang="en-US" sz="1200" dirty="0"/>
           </a:p>
@@ -3499,7 +3665,7 @@
                 <a:ea typeface="Georgia" pitchFamily="34" charset="-122"/>
                 <a:cs typeface="Georgia" pitchFamily="34" charset="-120"/>
               </a:rPr>
-              <a:t>Citation(s) used in this lesson</a:t>
+              <a:t>Homework</a:t>
             </a:r>
             <a:endParaRPr lang="en-US" sz="1800" dirty="0"/>
           </a:p>
@@ -3513,7 +3679,53 @@
         </p:nvSpPr>
         <p:spPr>
           <a:xfrm>
-            <a:off x="406301" y="870942"/>
+            <a:off x="634901" y="883593"/>
+            <a:ext cx="8102798" cy="487561"/>
+          </a:xfrm>
+          <a:prstGeom prst="rect">
+            <a:avLst/>
+          </a:prstGeom>
+          <a:noFill/>
+          <a:ln/>
+        </p:spPr>
+        <p:txBody>
+          <a:bodyPr wrap="square" lIns="0" tIns="0" rIns="0" bIns="0" rtlCol="0" anchor="t"/>
+          <a:lstStyle/>
+          <a:p>
+            <a:pPr algn="l" marL="342900" indent="-342900">
+              <a:lnSpc>
+                <a:spcPts val="1620"/>
+              </a:lnSpc>
+              <a:spcAft>
+                <a:spcPts val="300"/>
+              </a:spcAft>
+              <a:buSzPct val="100000"/>
+              <a:buChar char="•"/>
+            </a:pPr>
+            <a:r>
+              <a:rPr lang="en-US" sz="1200" dirty="0">
+                <a:solidFill>
+                  <a:srgbClr val="1C2833"/>
+                </a:solidFill>
+                <a:latin typeface="Arial" pitchFamily="34" charset="0"/>
+                <a:ea typeface="Arial" pitchFamily="34" charset="-122"/>
+                <a:cs typeface="Arial" pitchFamily="34" charset="-120"/>
+              </a:rPr>
+              <a:t>No new homework. (Spend the freed time finalising the project pair or topic — partners and projects are confirmed by Day 5.)</a:t>
+            </a:r>
+            <a:endParaRPr lang="en-US" sz="1200" dirty="0"/>
+          </a:p>
+        </p:txBody>
+      </p:sp>
+      <p:sp>
+        <p:nvSpPr>
+          <p:cNvPr id="5" name="Text 3"/>
+          <p:cNvSpPr/>
+          <p:nvPr/>
+        </p:nvSpPr>
+        <p:spPr>
+          <a:xfrm>
+            <a:off x="406301" y="4434929"/>
             <a:ext cx="8498026" cy="213271"/>
           </a:xfrm>
           <a:prstGeom prst="rect">
@@ -3547,7 +3759,1247 @@
                 <a:ea typeface="Arial" pitchFamily="34" charset="-122"/>
                 <a:cs typeface="Arial" pitchFamily="34" charset="-120"/>
               </a:rPr>
-              <a:t>– No new citations introduced. Review citations from Day 1–3.</a:t>
+              <a:t>Middle ·  · IKS Curriculum</a:t>
+            </a:r>
+            <a:endParaRPr lang="en-US" sz="1200" dirty="0"/>
+          </a:p>
+        </p:txBody>
+      </p:sp>
+    </p:spTree>
+  </p:cSld>
+  <p:clrMapOvr>
+    <a:masterClrMapping/>
+  </p:clrMapOvr>
+</p:sld>
+</file>
+
+<file path=ppt/slides/slide14.xml><?xml version="1.0" encoding="utf-8"?>
+<p:sld xmlns:a="http://schemas.openxmlformats.org/drawingml/2006/main" xmlns:r="http://schemas.openxmlformats.org/officeDocument/2006/relationships" xmlns:p="http://schemas.openxmlformats.org/presentationml/2006/main">
+  <p:cSld name="Slide 14">
+    <p:bg>
+      <p:bgPr>
+        <a:solidFill>
+          <a:srgbClr val="FFFFFF"/>
+        </a:solidFill>
+      </p:bgPr>
+    </p:bg>
+    <p:spTree>
+      <p:nvGrpSpPr>
+        <p:cNvPr id="1" name=""/>
+        <p:cNvGrpSpPr/>
+        <p:nvPr/>
+      </p:nvGrpSpPr>
+      <p:grpSpPr>
+        <a:xfrm>
+          <a:off x="0" y="0"/>
+          <a:ext cx="0" cy="0"/>
+          <a:chOff x="0" y="0"/>
+          <a:chExt cx="0" cy="0"/>
+        </a:xfrm>
+      </p:grpSpPr>
+      <p:sp>
+        <p:nvSpPr>
+          <p:cNvPr id="2" name="Text 0"/>
+          <p:cNvSpPr/>
+          <p:nvPr/>
+        </p:nvSpPr>
+        <p:spPr>
+          <a:xfrm>
+            <a:off x="0" y="0"/>
+            <a:ext cx="9144000" cy="101501"/>
+          </a:xfrm>
+          <a:prstGeom prst="rect">
+            <a:avLst/>
+          </a:prstGeom>
+          <a:solidFill>
+            <a:srgbClr val="277884"/>
+          </a:solidFill>
+          <a:ln/>
+        </p:spPr>
+        <p:txBody>
+          <a:bodyPr wrap="square" rtlCol="0" anchor="ctr"/>
+          <a:lstStyle/>
+          <a:p>
+            <a:pPr indent="0" marL="0">
+              <a:buNone/>
+            </a:pPr>
+            <a:endParaRPr lang="en-US" dirty="0"/>
+          </a:p>
+        </p:txBody>
+      </p:sp>
+      <p:sp>
+        <p:nvSpPr>
+          <p:cNvPr id="3" name="Text 1"/>
+          <p:cNvSpPr/>
+          <p:nvPr/>
+        </p:nvSpPr>
+        <p:spPr>
+          <a:xfrm>
+            <a:off x="406301" y="457051"/>
+            <a:ext cx="8498026" cy="274290"/>
+          </a:xfrm>
+          <a:prstGeom prst="rect">
+            <a:avLst/>
+          </a:prstGeom>
+          <a:noFill/>
+          <a:ln/>
+        </p:spPr>
+        <p:txBody>
+          <a:bodyPr wrap="square" lIns="0" tIns="0" rIns="0" bIns="0" rtlCol="0" anchor="t"/>
+          <a:lstStyle/>
+          <a:p>
+            <a:pPr algn="l" indent="0" marL="0">
+              <a:lnSpc>
+                <a:spcPts val="2160"/>
+              </a:lnSpc>
+              <a:spcBef>
+                <a:spcPts val="600"/>
+              </a:spcBef>
+              <a:spcAft>
+                <a:spcPts val="800"/>
+              </a:spcAft>
+              <a:buNone/>
+            </a:pPr>
+            <a:r>
+              <a:rPr lang="en-US" sz="1800" b="1" dirty="0">
+                <a:solidFill>
+                  <a:srgbClr val="FE4447"/>
+                </a:solidFill>
+                <a:latin typeface="Georgia" pitchFamily="34" charset="0"/>
+                <a:ea typeface="Georgia" pitchFamily="34" charset="-122"/>
+                <a:cs typeface="Georgia" pitchFamily="34" charset="-120"/>
+              </a:rPr>
+              <a:t>Differentiation</a:t>
+            </a:r>
+            <a:endParaRPr lang="en-US" sz="1800" dirty="0"/>
+          </a:p>
+        </p:txBody>
+      </p:sp>
+      <p:sp>
+        <p:nvSpPr>
+          <p:cNvPr id="4" name="Text 2"/>
+          <p:cNvSpPr/>
+          <p:nvPr/>
+        </p:nvSpPr>
+        <p:spPr>
+          <a:xfrm>
+            <a:off x="634901" y="883593"/>
+            <a:ext cx="8102798" cy="937022"/>
+          </a:xfrm>
+          <a:prstGeom prst="rect">
+            <a:avLst/>
+          </a:prstGeom>
+          <a:noFill/>
+          <a:ln/>
+        </p:spPr>
+        <p:txBody>
+          <a:bodyPr wrap="square" lIns="0" tIns="0" rIns="0" bIns="0" rtlCol="0" anchor="t"/>
+          <a:lstStyle/>
+          <a:p>
+            <a:pPr algn="l" marL="342900" indent="-342900">
+              <a:lnSpc>
+                <a:spcPts val="1620"/>
+              </a:lnSpc>
+              <a:spcAft>
+                <a:spcPts val="300"/>
+              </a:spcAft>
+              <a:buSzPct val="100000"/>
+              <a:buChar char="•"/>
+            </a:pPr>
+            <a:r>
+              <a:rPr lang="en-US" sz="1200" b="1" dirty="0">
+                <a:solidFill>
+                  <a:srgbClr val="1C2833"/>
+                </a:solidFill>
+                <a:latin typeface="Arial" pitchFamily="34" charset="0"/>
+                <a:ea typeface="Arial" pitchFamily="34" charset="-122"/>
+                <a:cs typeface="Arial" pitchFamily="34" charset="-120"/>
+              </a:rPr>
+              <a:t>One tier up:</a:t>
+            </a:r>
+            <a:pPr algn="l" indent="0" marL="0">
+              <a:lnSpc>
+                <a:spcPts val="1620"/>
+              </a:lnSpc>
+              <a:spcAft>
+                <a:spcPts val="300"/>
+              </a:spcAft>
+              <a:buNone/>
+            </a:pPr>
+            <a:r>
+              <a:rPr lang="en-US" sz="1200" dirty="0">
+                <a:solidFill>
+                  <a:srgbClr val="1C2833"/>
+                </a:solidFill>
+                <a:latin typeface="Arial" pitchFamily="34" charset="0"/>
+                <a:ea typeface="Arial" pitchFamily="34" charset="-122"/>
+                <a:cs typeface="Arial" pitchFamily="34" charset="-120"/>
+              </a:rPr>
+              <a:t> After sorting, pick the </a:t>
+            </a:r>
+            <a:pPr algn="l" indent="0" marL="0">
+              <a:lnSpc>
+                <a:spcPts val="1620"/>
+              </a:lnSpc>
+              <a:spcAft>
+                <a:spcPts val="300"/>
+              </a:spcAft>
+              <a:buNone/>
+            </a:pPr>
+            <a:r>
+              <a:rPr lang="en-US" sz="1200" b="1" dirty="0">
+                <a:solidFill>
+                  <a:srgbClr val="1C2833"/>
+                </a:solidFill>
+                <a:latin typeface="Arial" pitchFamily="34" charset="0"/>
+                <a:ea typeface="Arial" pitchFamily="34" charset="-122"/>
+                <a:cs typeface="Arial" pitchFamily="34" charset="-120"/>
+              </a:rPr>
+              <a:t>single most "mixed"</a:t>
+            </a:r>
+            <a:pPr algn="l" indent="0" marL="0">
+              <a:lnSpc>
+                <a:spcPts val="1620"/>
+              </a:lnSpc>
+              <a:spcAft>
+                <a:spcPts val="300"/>
+              </a:spcAft>
+              <a:buNone/>
+            </a:pPr>
+            <a:r>
+              <a:rPr lang="en-US" sz="1200" dirty="0">
+                <a:solidFill>
+                  <a:srgbClr val="1C2833"/>
+                </a:solidFill>
+                <a:latin typeface="Arial" pitchFamily="34" charset="0"/>
+                <a:ea typeface="Arial" pitchFamily="34" charset="-122"/>
+                <a:cs typeface="Arial" pitchFamily="34" charset="-120"/>
+              </a:rPr>
+              <a:t> object and write a paragraph explaining the proportions you'd assign each of the five elements within it.</a:t>
+            </a:r>
+            <a:endParaRPr lang="en-US" sz="1200" dirty="0"/>
+          </a:p>
+          <a:p>
+            <a:pPr algn="l" marL="342900" indent="-342900">
+              <a:lnSpc>
+                <a:spcPts val="1620"/>
+              </a:lnSpc>
+              <a:spcAft>
+                <a:spcPts val="300"/>
+              </a:spcAft>
+              <a:buSzPct val="100000"/>
+              <a:buChar char="•"/>
+            </a:pPr>
+            <a:r>
+              <a:rPr lang="en-US" sz="1200" b="1" dirty="0">
+                <a:solidFill>
+                  <a:srgbClr val="1C2833"/>
+                </a:solidFill>
+                <a:latin typeface="Arial" pitchFamily="34" charset="0"/>
+                <a:ea typeface="Arial" pitchFamily="34" charset="-122"/>
+                <a:cs typeface="Arial" pitchFamily="34" charset="-120"/>
+              </a:rPr>
+              <a:t>One tier down:</a:t>
+            </a:r>
+            <a:pPr algn="l" indent="0" marL="0">
+              <a:lnSpc>
+                <a:spcPts val="1620"/>
+              </a:lnSpc>
+              <a:spcAft>
+                <a:spcPts val="300"/>
+              </a:spcAft>
+              <a:buNone/>
+            </a:pPr>
+            <a:r>
+              <a:rPr lang="en-US" sz="1200" dirty="0">
+                <a:solidFill>
+                  <a:srgbClr val="1C2833"/>
+                </a:solidFill>
+                <a:latin typeface="Arial" pitchFamily="34" charset="0"/>
+                <a:ea typeface="Arial" pitchFamily="34" charset="-122"/>
+                <a:cs typeface="Arial" pitchFamily="34" charset="-120"/>
+              </a:rPr>
+              <a:t> If five categories feel hard, sort first into THREE — </a:t>
+            </a:r>
+            <a:pPr algn="l" indent="0" marL="0">
+              <a:lnSpc>
+                <a:spcPts val="1620"/>
+              </a:lnSpc>
+              <a:spcAft>
+                <a:spcPts val="300"/>
+              </a:spcAft>
+              <a:buNone/>
+            </a:pPr>
+            <a:r>
+              <a:rPr lang="en-US" sz="1200" i="1" dirty="0">
+                <a:solidFill>
+                  <a:srgbClr val="1C2833"/>
+                </a:solidFill>
+                <a:latin typeface="Arial" pitchFamily="34" charset="0"/>
+                <a:ea typeface="Arial" pitchFamily="34" charset="-122"/>
+                <a:cs typeface="Arial" pitchFamily="34" charset="-120"/>
+              </a:rPr>
+              <a:t>pṛthvī, ap, vāyu</a:t>
+            </a:r>
+            <a:pPr algn="l" indent="0" marL="0">
+              <a:lnSpc>
+                <a:spcPts val="1620"/>
+              </a:lnSpc>
+              <a:spcAft>
+                <a:spcPts val="300"/>
+              </a:spcAft>
+              <a:buNone/>
+            </a:pPr>
+            <a:r>
+              <a:rPr lang="en-US" sz="1200" dirty="0">
+                <a:solidFill>
+                  <a:srgbClr val="1C2833"/>
+                </a:solidFill>
+                <a:latin typeface="Arial" pitchFamily="34" charset="0"/>
+                <a:ea typeface="Arial" pitchFamily="34" charset="-122"/>
+                <a:cs typeface="Arial" pitchFamily="34" charset="-120"/>
+              </a:rPr>
+              <a:t> — then come back and consider where </a:t>
+            </a:r>
+            <a:pPr algn="l" indent="0" marL="0">
+              <a:lnSpc>
+                <a:spcPts val="1620"/>
+              </a:lnSpc>
+              <a:spcAft>
+                <a:spcPts val="300"/>
+              </a:spcAft>
+              <a:buNone/>
+            </a:pPr>
+            <a:r>
+              <a:rPr lang="en-US" sz="1200" i="1" dirty="0">
+                <a:solidFill>
+                  <a:srgbClr val="1C2833"/>
+                </a:solidFill>
+                <a:latin typeface="Arial" pitchFamily="34" charset="0"/>
+                <a:ea typeface="Arial" pitchFamily="34" charset="-122"/>
+                <a:cs typeface="Arial" pitchFamily="34" charset="-120"/>
+              </a:rPr>
+              <a:t>tejas</a:t>
+            </a:r>
+            <a:pPr algn="l" indent="0" marL="0">
+              <a:lnSpc>
+                <a:spcPts val="1620"/>
+              </a:lnSpc>
+              <a:spcAft>
+                <a:spcPts val="300"/>
+              </a:spcAft>
+              <a:buNone/>
+            </a:pPr>
+            <a:r>
+              <a:rPr lang="en-US" sz="1200" dirty="0">
+                <a:solidFill>
+                  <a:srgbClr val="1C2833"/>
+                </a:solidFill>
+                <a:latin typeface="Arial" pitchFamily="34" charset="0"/>
+                <a:ea typeface="Arial" pitchFamily="34" charset="-122"/>
+                <a:cs typeface="Arial" pitchFamily="34" charset="-120"/>
+              </a:rPr>
+              <a:t> or </a:t>
+            </a:r>
+            <a:pPr algn="l" indent="0" marL="0">
+              <a:lnSpc>
+                <a:spcPts val="1620"/>
+              </a:lnSpc>
+              <a:spcAft>
+                <a:spcPts val="300"/>
+              </a:spcAft>
+              <a:buNone/>
+            </a:pPr>
+            <a:r>
+              <a:rPr lang="en-US" sz="1200" i="1" dirty="0">
+                <a:solidFill>
+                  <a:srgbClr val="1C2833"/>
+                </a:solidFill>
+                <a:latin typeface="Arial" pitchFamily="34" charset="0"/>
+                <a:ea typeface="Arial" pitchFamily="34" charset="-122"/>
+                <a:cs typeface="Arial" pitchFamily="34" charset="-120"/>
+              </a:rPr>
+              <a:t>ākāśa</a:t>
+            </a:r>
+            <a:pPr algn="l" indent="0" marL="0">
+              <a:lnSpc>
+                <a:spcPts val="1620"/>
+              </a:lnSpc>
+              <a:spcAft>
+                <a:spcPts val="300"/>
+              </a:spcAft>
+              <a:buNone/>
+            </a:pPr>
+            <a:r>
+              <a:rPr lang="en-US" sz="1200" dirty="0">
+                <a:solidFill>
+                  <a:srgbClr val="1C2833"/>
+                </a:solidFill>
+                <a:latin typeface="Arial" pitchFamily="34" charset="0"/>
+                <a:ea typeface="Arial" pitchFamily="34" charset="-122"/>
+                <a:cs typeface="Arial" pitchFamily="34" charset="-120"/>
+              </a:rPr>
+              <a:t> should be added.</a:t>
+            </a:r>
+            <a:endParaRPr lang="en-US" sz="1200" dirty="0"/>
+          </a:p>
+        </p:txBody>
+      </p:sp>
+      <p:sp>
+        <p:nvSpPr>
+          <p:cNvPr id="5" name="Text 3"/>
+          <p:cNvSpPr/>
+          <p:nvPr/>
+        </p:nvSpPr>
+        <p:spPr>
+          <a:xfrm>
+            <a:off x="406301" y="4434929"/>
+            <a:ext cx="8498026" cy="213271"/>
+          </a:xfrm>
+          <a:prstGeom prst="rect">
+            <a:avLst/>
+          </a:prstGeom>
+          <a:noFill/>
+          <a:ln/>
+        </p:spPr>
+        <p:txBody>
+          <a:bodyPr wrap="square" lIns="0" tIns="0" rIns="0" bIns="0" rtlCol="0" anchor="t"/>
+          <a:lstStyle/>
+          <a:p>
+            <a:pPr algn="l" indent="0" marL="0">
+              <a:lnSpc>
+                <a:spcPts val="1680"/>
+              </a:lnSpc>
+              <a:spcBef>
+                <a:spcPts val="300"/>
+              </a:spcBef>
+              <a:spcAft>
+                <a:spcPts val="300"/>
+              </a:spcAft>
+              <a:buNone/>
+            </a:pPr>
+            <a:r>
+              <a:rPr lang="en-US" sz="1200" dirty="0">
+                <a:solidFill>
+                  <a:srgbClr val="1C2833"/>
+                </a:solidFill>
+                <a:latin typeface="Arial" pitchFamily="34" charset="0"/>
+                <a:ea typeface="Arial" pitchFamily="34" charset="-122"/>
+                <a:cs typeface="Arial" pitchFamily="34" charset="-120"/>
+              </a:rPr>
+              <a:t>Middle ·  · IKS Curriculum</a:t>
+            </a:r>
+            <a:endParaRPr lang="en-US" sz="1200" dirty="0"/>
+          </a:p>
+        </p:txBody>
+      </p:sp>
+    </p:spTree>
+  </p:cSld>
+  <p:clrMapOvr>
+    <a:masterClrMapping/>
+  </p:clrMapOvr>
+</p:sld>
+</file>
+
+<file path=ppt/slides/slide15.xml><?xml version="1.0" encoding="utf-8"?>
+<p:sld xmlns:a="http://schemas.openxmlformats.org/drawingml/2006/main" xmlns:r="http://schemas.openxmlformats.org/officeDocument/2006/relationships" xmlns:p="http://schemas.openxmlformats.org/presentationml/2006/main">
+  <p:cSld name="Slide 15">
+    <p:bg>
+      <p:bgPr>
+        <a:solidFill>
+          <a:srgbClr val="FFFFFF"/>
+        </a:solidFill>
+      </p:bgPr>
+    </p:bg>
+    <p:spTree>
+      <p:nvGrpSpPr>
+        <p:cNvPr id="1" name=""/>
+        <p:cNvGrpSpPr/>
+        <p:nvPr/>
+      </p:nvGrpSpPr>
+      <p:grpSpPr>
+        <a:xfrm>
+          <a:off x="0" y="0"/>
+          <a:ext cx="0" cy="0"/>
+          <a:chOff x="0" y="0"/>
+          <a:chExt cx="0" cy="0"/>
+        </a:xfrm>
+      </p:grpSpPr>
+      <p:sp>
+        <p:nvSpPr>
+          <p:cNvPr id="2" name="Text 0"/>
+          <p:cNvSpPr/>
+          <p:nvPr/>
+        </p:nvSpPr>
+        <p:spPr>
+          <a:xfrm>
+            <a:off x="0" y="0"/>
+            <a:ext cx="9144000" cy="101501"/>
+          </a:xfrm>
+          <a:prstGeom prst="rect">
+            <a:avLst/>
+          </a:prstGeom>
+          <a:solidFill>
+            <a:srgbClr val="277884"/>
+          </a:solidFill>
+          <a:ln/>
+        </p:spPr>
+        <p:txBody>
+          <a:bodyPr wrap="square" rtlCol="0" anchor="ctr"/>
+          <a:lstStyle/>
+          <a:p>
+            <a:pPr indent="0" marL="0">
+              <a:buNone/>
+            </a:pPr>
+            <a:endParaRPr lang="en-US" dirty="0"/>
+          </a:p>
+        </p:txBody>
+      </p:sp>
+      <p:sp>
+        <p:nvSpPr>
+          <p:cNvPr id="3" name="Text 1"/>
+          <p:cNvSpPr/>
+          <p:nvPr/>
+        </p:nvSpPr>
+        <p:spPr>
+          <a:xfrm>
+            <a:off x="406301" y="457051"/>
+            <a:ext cx="8498026" cy="274290"/>
+          </a:xfrm>
+          <a:prstGeom prst="rect">
+            <a:avLst/>
+          </a:prstGeom>
+          <a:noFill/>
+          <a:ln/>
+        </p:spPr>
+        <p:txBody>
+          <a:bodyPr wrap="square" lIns="0" tIns="0" rIns="0" bIns="0" rtlCol="0" anchor="t"/>
+          <a:lstStyle/>
+          <a:p>
+            <a:pPr algn="l" indent="0" marL="0">
+              <a:lnSpc>
+                <a:spcPts val="2160"/>
+              </a:lnSpc>
+              <a:spcBef>
+                <a:spcPts val="600"/>
+              </a:spcBef>
+              <a:spcAft>
+                <a:spcPts val="800"/>
+              </a:spcAft>
+              <a:buNone/>
+            </a:pPr>
+            <a:r>
+              <a:rPr lang="en-US" sz="1800" b="1" dirty="0">
+                <a:solidFill>
+                  <a:srgbClr val="FE4447"/>
+                </a:solidFill>
+                <a:latin typeface="Georgia" pitchFamily="34" charset="0"/>
+                <a:ea typeface="Georgia" pitchFamily="34" charset="-122"/>
+                <a:cs typeface="Georgia" pitchFamily="34" charset="-120"/>
+              </a:rPr>
+              <a:t>Teacher notes</a:t>
+            </a:r>
+            <a:endParaRPr lang="en-US" sz="1800" dirty="0"/>
+          </a:p>
+        </p:txBody>
+      </p:sp>
+      <p:sp>
+        <p:nvSpPr>
+          <p:cNvPr id="4" name="Text 2"/>
+          <p:cNvSpPr/>
+          <p:nvPr/>
+        </p:nvSpPr>
+        <p:spPr>
+          <a:xfrm>
+            <a:off x="634901" y="883593"/>
+            <a:ext cx="8102798" cy="1386483"/>
+          </a:xfrm>
+          <a:prstGeom prst="rect">
+            <a:avLst/>
+          </a:prstGeom>
+          <a:noFill/>
+          <a:ln/>
+        </p:spPr>
+        <p:txBody>
+          <a:bodyPr wrap="square" lIns="0" tIns="0" rIns="0" bIns="0" rtlCol="0" anchor="t"/>
+          <a:lstStyle/>
+          <a:p>
+            <a:pPr algn="l" marL="342900" indent="-342900">
+              <a:lnSpc>
+                <a:spcPts val="1620"/>
+              </a:lnSpc>
+              <a:spcAft>
+                <a:spcPts val="300"/>
+              </a:spcAft>
+              <a:buSzPct val="100000"/>
+              <a:buChar char="•"/>
+            </a:pPr>
+            <a:r>
+              <a:rPr lang="en-US" sz="1200" dirty="0">
+                <a:solidFill>
+                  <a:srgbClr val="1C2833"/>
+                </a:solidFill>
+                <a:latin typeface="Arial" pitchFamily="34" charset="0"/>
+                <a:ea typeface="Arial" pitchFamily="34" charset="-122"/>
+                <a:cs typeface="Arial" pitchFamily="34" charset="-120"/>
+              </a:rPr>
+              <a:t>This activity often surfaces interesting disagreements between students who classify the same object differently. </a:t>
+            </a:r>
+            <a:pPr algn="l" indent="0" marL="0">
+              <a:lnSpc>
+                <a:spcPts val="1620"/>
+              </a:lnSpc>
+              <a:spcAft>
+                <a:spcPts val="300"/>
+              </a:spcAft>
+              <a:buNone/>
+            </a:pPr>
+            <a:r>
+              <a:rPr lang="en-US" sz="1200" b="1" dirty="0">
+                <a:solidFill>
+                  <a:srgbClr val="1C2833"/>
+                </a:solidFill>
+                <a:latin typeface="Arial" pitchFamily="34" charset="0"/>
+                <a:ea typeface="Arial" pitchFamily="34" charset="-122"/>
+                <a:cs typeface="Arial" pitchFamily="34" charset="-120"/>
+              </a:rPr>
+              <a:t>Don't resolve the disagreements quickly</a:t>
+            </a:r>
+            <a:pPr algn="l" indent="0" marL="0">
+              <a:lnSpc>
+                <a:spcPts val="1620"/>
+              </a:lnSpc>
+              <a:spcAft>
+                <a:spcPts val="300"/>
+              </a:spcAft>
+              <a:buNone/>
+            </a:pPr>
+            <a:r>
+              <a:rPr lang="en-US" sz="1200" dirty="0">
+                <a:solidFill>
+                  <a:srgbClr val="1C2833"/>
+                </a:solidFill>
+                <a:latin typeface="Arial" pitchFamily="34" charset="0"/>
+                <a:ea typeface="Arial" pitchFamily="34" charset="-122"/>
+                <a:cs typeface="Arial" pitchFamily="34" charset="-120"/>
+              </a:rPr>
+              <a:t> — let them argue it out. The reasoning is more important than the answer.</a:t>
+            </a:r>
+            <a:endParaRPr lang="en-US" sz="1200" dirty="0"/>
+          </a:p>
+          <a:p>
+            <a:pPr algn="l" marL="342900" indent="-342900">
+              <a:lnSpc>
+                <a:spcPts val="1620"/>
+              </a:lnSpc>
+              <a:spcAft>
+                <a:spcPts val="300"/>
+              </a:spcAft>
+              <a:buSzPct val="100000"/>
+              <a:buChar char="•"/>
+            </a:pPr>
+            <a:r>
+              <a:rPr lang="en-US" sz="1200" dirty="0">
+                <a:solidFill>
+                  <a:srgbClr val="1C2833"/>
+                </a:solidFill>
+                <a:latin typeface="Arial" pitchFamily="34" charset="0"/>
+                <a:ea typeface="Arial" pitchFamily="34" charset="-122"/>
+                <a:cs typeface="Arial" pitchFamily="34" charset="-120"/>
+              </a:rPr>
+              <a:t>A common dispute: where does a "balloon filled with air" go? </a:t>
+            </a:r>
+            <a:pPr algn="l" indent="0" marL="0">
+              <a:lnSpc>
+                <a:spcPts val="1620"/>
+              </a:lnSpc>
+              <a:spcAft>
+                <a:spcPts val="300"/>
+              </a:spcAft>
+              <a:buNone/>
+            </a:pPr>
+            <a:r>
+              <a:rPr lang="en-US" sz="1200" i="1" dirty="0">
+                <a:solidFill>
+                  <a:srgbClr val="1C2833"/>
+                </a:solidFill>
+                <a:latin typeface="Arial" pitchFamily="34" charset="0"/>
+                <a:ea typeface="Arial" pitchFamily="34" charset="-122"/>
+                <a:cs typeface="Arial" pitchFamily="34" charset="-120"/>
+              </a:rPr>
+              <a:t>Vāyu</a:t>
+            </a:r>
+            <a:pPr algn="l" indent="0" marL="0">
+              <a:lnSpc>
+                <a:spcPts val="1620"/>
+              </a:lnSpc>
+              <a:spcAft>
+                <a:spcPts val="300"/>
+              </a:spcAft>
+              <a:buNone/>
+            </a:pPr>
+            <a:r>
+              <a:rPr lang="en-US" sz="1200" dirty="0">
+                <a:solidFill>
+                  <a:srgbClr val="1C2833"/>
+                </a:solidFill>
+                <a:latin typeface="Arial" pitchFamily="34" charset="0"/>
+                <a:ea typeface="Arial" pitchFamily="34" charset="-122"/>
+                <a:cs typeface="Arial" pitchFamily="34" charset="-120"/>
+              </a:rPr>
+              <a:t> because the </a:t>
+            </a:r>
+            <a:pPr algn="l" indent="0" marL="0">
+              <a:lnSpc>
+                <a:spcPts val="1620"/>
+              </a:lnSpc>
+              <a:spcAft>
+                <a:spcPts val="300"/>
+              </a:spcAft>
+              <a:buNone/>
+            </a:pPr>
+            <a:r>
+              <a:rPr lang="en-US" sz="1200" i="1" dirty="0">
+                <a:solidFill>
+                  <a:srgbClr val="1C2833"/>
+                </a:solidFill>
+                <a:latin typeface="Arial" pitchFamily="34" charset="0"/>
+                <a:ea typeface="Arial" pitchFamily="34" charset="-122"/>
+                <a:cs typeface="Arial" pitchFamily="34" charset="-120"/>
+              </a:rPr>
+              <a:t>content</a:t>
+            </a:r>
+            <a:pPr algn="l" indent="0" marL="0">
+              <a:lnSpc>
+                <a:spcPts val="1620"/>
+              </a:lnSpc>
+              <a:spcAft>
+                <a:spcPts val="300"/>
+              </a:spcAft>
+              <a:buNone/>
+            </a:pPr>
+            <a:r>
+              <a:rPr lang="en-US" sz="1200" dirty="0">
+                <a:solidFill>
+                  <a:srgbClr val="1C2833"/>
+                </a:solidFill>
+                <a:latin typeface="Arial" pitchFamily="34" charset="0"/>
+                <a:ea typeface="Arial" pitchFamily="34" charset="-122"/>
+                <a:cs typeface="Arial" pitchFamily="34" charset="-120"/>
+              </a:rPr>
+              <a:t> is air? Or </a:t>
+            </a:r>
+            <a:pPr algn="l" indent="0" marL="0">
+              <a:lnSpc>
+                <a:spcPts val="1620"/>
+              </a:lnSpc>
+              <a:spcAft>
+                <a:spcPts val="300"/>
+              </a:spcAft>
+              <a:buNone/>
+            </a:pPr>
+            <a:r>
+              <a:rPr lang="en-US" sz="1200" i="1" dirty="0">
+                <a:solidFill>
+                  <a:srgbClr val="1C2833"/>
+                </a:solidFill>
+                <a:latin typeface="Arial" pitchFamily="34" charset="0"/>
+                <a:ea typeface="Arial" pitchFamily="34" charset="-122"/>
+                <a:cs typeface="Arial" pitchFamily="34" charset="-120"/>
+              </a:rPr>
+              <a:t>pṛthvī</a:t>
+            </a:r>
+            <a:pPr algn="l" indent="0" marL="0">
+              <a:lnSpc>
+                <a:spcPts val="1620"/>
+              </a:lnSpc>
+              <a:spcAft>
+                <a:spcPts val="300"/>
+              </a:spcAft>
+              <a:buNone/>
+            </a:pPr>
+            <a:r>
+              <a:rPr lang="en-US" sz="1200" dirty="0">
+                <a:solidFill>
+                  <a:srgbClr val="1C2833"/>
+                </a:solidFill>
+                <a:latin typeface="Arial" pitchFamily="34" charset="0"/>
+                <a:ea typeface="Arial" pitchFamily="34" charset="-122"/>
+                <a:cs typeface="Arial" pitchFamily="34" charset="-120"/>
+              </a:rPr>
+              <a:t> because the </a:t>
+            </a:r>
+            <a:pPr algn="l" indent="0" marL="0">
+              <a:lnSpc>
+                <a:spcPts val="1620"/>
+              </a:lnSpc>
+              <a:spcAft>
+                <a:spcPts val="300"/>
+              </a:spcAft>
+              <a:buNone/>
+            </a:pPr>
+            <a:r>
+              <a:rPr lang="en-US" sz="1200" i="1" dirty="0">
+                <a:solidFill>
+                  <a:srgbClr val="1C2833"/>
+                </a:solidFill>
+                <a:latin typeface="Arial" pitchFamily="34" charset="0"/>
+                <a:ea typeface="Arial" pitchFamily="34" charset="-122"/>
+                <a:cs typeface="Arial" pitchFamily="34" charset="-120"/>
+              </a:rPr>
+              <a:t>balloon material</a:t>
+            </a:r>
+            <a:pPr algn="l" indent="0" marL="0">
+              <a:lnSpc>
+                <a:spcPts val="1620"/>
+              </a:lnSpc>
+              <a:spcAft>
+                <a:spcPts val="300"/>
+              </a:spcAft>
+              <a:buNone/>
+            </a:pPr>
+            <a:r>
+              <a:rPr lang="en-US" sz="1200" dirty="0">
+                <a:solidFill>
+                  <a:srgbClr val="1C2833"/>
+                </a:solidFill>
+                <a:latin typeface="Arial" pitchFamily="34" charset="0"/>
+                <a:ea typeface="Arial" pitchFamily="34" charset="-122"/>
+                <a:cs typeface="Arial" pitchFamily="34" charset="-120"/>
+              </a:rPr>
+              <a:t> is rubber (a solid)? Both are defensible — push students to articulate which one is "dominant."</a:t>
+            </a:r>
+            <a:endParaRPr lang="en-US" sz="1200" dirty="0"/>
+          </a:p>
+          <a:p>
+            <a:pPr algn="l" marL="342900" indent="-342900">
+              <a:lnSpc>
+                <a:spcPts val="1620"/>
+              </a:lnSpc>
+              <a:spcAft>
+                <a:spcPts val="300"/>
+              </a:spcAft>
+              <a:buSzPct val="100000"/>
+              <a:buChar char="•"/>
+            </a:pPr>
+            <a:r>
+              <a:rPr lang="en-US" sz="1200" dirty="0">
+                <a:solidFill>
+                  <a:srgbClr val="1C2833"/>
+                </a:solidFill>
+                <a:latin typeface="Arial" pitchFamily="34" charset="0"/>
+                <a:ea typeface="Arial" pitchFamily="34" charset="-122"/>
+                <a:cs typeface="Arial" pitchFamily="34" charset="-120"/>
+              </a:rPr>
+              <a:t>Look for students who are insisting on a single rigid answer. They are missing the lesson — gently steer toward "and what's the next-strongest element here?"</a:t>
+            </a:r>
+            <a:endParaRPr lang="en-US" sz="1200" dirty="0"/>
+          </a:p>
+        </p:txBody>
+      </p:sp>
+      <p:sp>
+        <p:nvSpPr>
+          <p:cNvPr id="5" name="Text 3"/>
+          <p:cNvSpPr/>
+          <p:nvPr/>
+        </p:nvSpPr>
+        <p:spPr>
+          <a:xfrm>
+            <a:off x="406301" y="4434929"/>
+            <a:ext cx="8498026" cy="213271"/>
+          </a:xfrm>
+          <a:prstGeom prst="rect">
+            <a:avLst/>
+          </a:prstGeom>
+          <a:noFill/>
+          <a:ln/>
+        </p:spPr>
+        <p:txBody>
+          <a:bodyPr wrap="square" lIns="0" tIns="0" rIns="0" bIns="0" rtlCol="0" anchor="t"/>
+          <a:lstStyle/>
+          <a:p>
+            <a:pPr algn="l" indent="0" marL="0">
+              <a:lnSpc>
+                <a:spcPts val="1680"/>
+              </a:lnSpc>
+              <a:spcBef>
+                <a:spcPts val="300"/>
+              </a:spcBef>
+              <a:spcAft>
+                <a:spcPts val="300"/>
+              </a:spcAft>
+              <a:buNone/>
+            </a:pPr>
+            <a:r>
+              <a:rPr lang="en-US" sz="1200" dirty="0">
+                <a:solidFill>
+                  <a:srgbClr val="1C2833"/>
+                </a:solidFill>
+                <a:latin typeface="Arial" pitchFamily="34" charset="0"/>
+                <a:ea typeface="Arial" pitchFamily="34" charset="-122"/>
+                <a:cs typeface="Arial" pitchFamily="34" charset="-120"/>
+              </a:rPr>
+              <a:t>Middle ·  · IKS Curriculum</a:t>
+            </a:r>
+            <a:endParaRPr lang="en-US" sz="1200" dirty="0"/>
+          </a:p>
+        </p:txBody>
+      </p:sp>
+    </p:spTree>
+  </p:cSld>
+  <p:clrMapOvr>
+    <a:masterClrMapping/>
+  </p:clrMapOvr>
+</p:sld>
+</file>
+
+<file path=ppt/slides/slide16.xml><?xml version="1.0" encoding="utf-8"?>
+<p:sld xmlns:a="http://schemas.openxmlformats.org/drawingml/2006/main" xmlns:r="http://schemas.openxmlformats.org/officeDocument/2006/relationships" xmlns:p="http://schemas.openxmlformats.org/presentationml/2006/main">
+  <p:cSld name="Slide 16">
+    <p:bg>
+      <p:bgPr>
+        <a:solidFill>
+          <a:srgbClr val="FFFFFF"/>
+        </a:solidFill>
+      </p:bgPr>
+    </p:bg>
+    <p:spTree>
+      <p:nvGrpSpPr>
+        <p:cNvPr id="1" name=""/>
+        <p:cNvGrpSpPr/>
+        <p:nvPr/>
+      </p:nvGrpSpPr>
+      <p:grpSpPr>
+        <a:xfrm>
+          <a:off x="0" y="0"/>
+          <a:ext cx="0" cy="0"/>
+          <a:chOff x="0" y="0"/>
+          <a:chExt cx="0" cy="0"/>
+        </a:xfrm>
+      </p:grpSpPr>
+      <p:sp>
+        <p:nvSpPr>
+          <p:cNvPr id="2" name="Text 0"/>
+          <p:cNvSpPr/>
+          <p:nvPr/>
+        </p:nvSpPr>
+        <p:spPr>
+          <a:xfrm>
+            <a:off x="0" y="0"/>
+            <a:ext cx="9144000" cy="101501"/>
+          </a:xfrm>
+          <a:prstGeom prst="rect">
+            <a:avLst/>
+          </a:prstGeom>
+          <a:solidFill>
+            <a:srgbClr val="277884"/>
+          </a:solidFill>
+          <a:ln/>
+        </p:spPr>
+        <p:txBody>
+          <a:bodyPr wrap="square" rtlCol="0" anchor="ctr"/>
+          <a:lstStyle/>
+          <a:p>
+            <a:pPr indent="0" marL="0">
+              <a:buNone/>
+            </a:pPr>
+            <a:endParaRPr lang="en-US" dirty="0"/>
+          </a:p>
+        </p:txBody>
+      </p:sp>
+      <p:sp>
+        <p:nvSpPr>
+          <p:cNvPr id="3" name="Text 1"/>
+          <p:cNvSpPr/>
+          <p:nvPr/>
+        </p:nvSpPr>
+        <p:spPr>
+          <a:xfrm>
+            <a:off x="406301" y="457051"/>
+            <a:ext cx="8498026" cy="274290"/>
+          </a:xfrm>
+          <a:prstGeom prst="rect">
+            <a:avLst/>
+          </a:prstGeom>
+          <a:noFill/>
+          <a:ln/>
+        </p:spPr>
+        <p:txBody>
+          <a:bodyPr wrap="square" lIns="0" tIns="0" rIns="0" bIns="0" rtlCol="0" anchor="t"/>
+          <a:lstStyle/>
+          <a:p>
+            <a:pPr algn="l" indent="0" marL="0">
+              <a:lnSpc>
+                <a:spcPts val="2160"/>
+              </a:lnSpc>
+              <a:spcBef>
+                <a:spcPts val="600"/>
+              </a:spcBef>
+              <a:spcAft>
+                <a:spcPts val="800"/>
+              </a:spcAft>
+              <a:buNone/>
+            </a:pPr>
+            <a:r>
+              <a:rPr lang="en-US" sz="1800" b="1" dirty="0">
+                <a:solidFill>
+                  <a:srgbClr val="FE4447"/>
+                </a:solidFill>
+                <a:latin typeface="Georgia" pitchFamily="34" charset="0"/>
+                <a:ea typeface="Georgia" pitchFamily="34" charset="-122"/>
+                <a:cs typeface="Georgia" pitchFamily="34" charset="-120"/>
+              </a:rPr>
+              <a:t>Teacher notes (cont.)</a:t>
+            </a:r>
+            <a:endParaRPr lang="en-US" sz="1800" dirty="0"/>
+          </a:p>
+        </p:txBody>
+      </p:sp>
+      <p:sp>
+        <p:nvSpPr>
+          <p:cNvPr id="4" name="Text 2"/>
+          <p:cNvSpPr/>
+          <p:nvPr/>
+        </p:nvSpPr>
+        <p:spPr>
+          <a:xfrm>
+            <a:off x="634901" y="883593"/>
+            <a:ext cx="8102798" cy="281880"/>
+          </a:xfrm>
+          <a:prstGeom prst="rect">
+            <a:avLst/>
+          </a:prstGeom>
+          <a:noFill/>
+          <a:ln/>
+        </p:spPr>
+        <p:txBody>
+          <a:bodyPr wrap="square" lIns="0" tIns="0" rIns="0" bIns="0" rtlCol="0" anchor="t"/>
+          <a:lstStyle/>
+          <a:p>
+            <a:pPr algn="l" marL="342900" indent="-342900">
+              <a:lnSpc>
+                <a:spcPts val="1620"/>
+              </a:lnSpc>
+              <a:spcAft>
+                <a:spcPts val="300"/>
+              </a:spcAft>
+              <a:buSzPct val="100000"/>
+              <a:buChar char="•"/>
+            </a:pPr>
+            <a:r>
+              <a:rPr lang="en-US" sz="1200" dirty="0">
+                <a:solidFill>
+                  <a:srgbClr val="1C2833"/>
+                </a:solidFill>
+                <a:latin typeface="Arial" pitchFamily="34" charset="0"/>
+                <a:ea typeface="Arial" pitchFamily="34" charset="-122"/>
+                <a:cs typeface="Arial" pitchFamily="34" charset="-120"/>
+              </a:rPr>
+              <a:t>Photograph any especially good or disputed sorting choices; reuse on Day 7 group discussion.</a:t>
+            </a:r>
+            <a:endParaRPr lang="en-US" sz="1200" dirty="0"/>
+          </a:p>
+        </p:txBody>
+      </p:sp>
+      <p:sp>
+        <p:nvSpPr>
+          <p:cNvPr id="5" name="Text 3"/>
+          <p:cNvSpPr/>
+          <p:nvPr/>
+        </p:nvSpPr>
+        <p:spPr>
+          <a:xfrm>
+            <a:off x="406301" y="4434929"/>
+            <a:ext cx="8498026" cy="213271"/>
+          </a:xfrm>
+          <a:prstGeom prst="rect">
+            <a:avLst/>
+          </a:prstGeom>
+          <a:noFill/>
+          <a:ln/>
+        </p:spPr>
+        <p:txBody>
+          <a:bodyPr wrap="square" lIns="0" tIns="0" rIns="0" bIns="0" rtlCol="0" anchor="t"/>
+          <a:lstStyle/>
+          <a:p>
+            <a:pPr algn="l" indent="0" marL="0">
+              <a:lnSpc>
+                <a:spcPts val="1680"/>
+              </a:lnSpc>
+              <a:spcBef>
+                <a:spcPts val="300"/>
+              </a:spcBef>
+              <a:spcAft>
+                <a:spcPts val="300"/>
+              </a:spcAft>
+              <a:buNone/>
+            </a:pPr>
+            <a:r>
+              <a:rPr lang="en-US" sz="1200" dirty="0">
+                <a:solidFill>
+                  <a:srgbClr val="1C2833"/>
+                </a:solidFill>
+                <a:latin typeface="Arial" pitchFamily="34" charset="0"/>
+                <a:ea typeface="Arial" pitchFamily="34" charset="-122"/>
+                <a:cs typeface="Arial" pitchFamily="34" charset="-120"/>
+              </a:rPr>
+              <a:t>Middle ·  · IKS Curriculum</a:t>
+            </a:r>
+            <a:endParaRPr lang="en-US" sz="1200" dirty="0"/>
+          </a:p>
+        </p:txBody>
+      </p:sp>
+    </p:spTree>
+  </p:cSld>
+  <p:clrMapOvr>
+    <a:masterClrMapping/>
+  </p:clrMapOvr>
+</p:sld>
+</file>
+
+<file path=ppt/slides/slide17.xml><?xml version="1.0" encoding="utf-8"?>
+<p:sld xmlns:a="http://schemas.openxmlformats.org/drawingml/2006/main" xmlns:r="http://schemas.openxmlformats.org/officeDocument/2006/relationships" xmlns:p="http://schemas.openxmlformats.org/presentationml/2006/main">
+  <p:cSld name="Slide 17">
+    <p:bg>
+      <p:bgPr>
+        <a:solidFill>
+          <a:srgbClr val="FFFFFF"/>
+        </a:solidFill>
+      </p:bgPr>
+    </p:bg>
+    <p:spTree>
+      <p:nvGrpSpPr>
+        <p:cNvPr id="1" name=""/>
+        <p:cNvGrpSpPr/>
+        <p:nvPr/>
+      </p:nvGrpSpPr>
+      <p:grpSpPr>
+        <a:xfrm>
+          <a:off x="0" y="0"/>
+          <a:ext cx="0" cy="0"/>
+          <a:chOff x="0" y="0"/>
+          <a:chExt cx="0" cy="0"/>
+        </a:xfrm>
+      </p:grpSpPr>
+      <p:sp>
+        <p:nvSpPr>
+          <p:cNvPr id="2" name="Text 0"/>
+          <p:cNvSpPr/>
+          <p:nvPr/>
+        </p:nvSpPr>
+        <p:spPr>
+          <a:xfrm>
+            <a:off x="0" y="0"/>
+            <a:ext cx="9144000" cy="101501"/>
+          </a:xfrm>
+          <a:prstGeom prst="rect">
+            <a:avLst/>
+          </a:prstGeom>
+          <a:solidFill>
+            <a:srgbClr val="277884"/>
+          </a:solidFill>
+          <a:ln/>
+        </p:spPr>
+        <p:txBody>
+          <a:bodyPr wrap="square" rtlCol="0" anchor="ctr"/>
+          <a:lstStyle/>
+          <a:p>
+            <a:pPr indent="0" marL="0">
+              <a:buNone/>
+            </a:pPr>
+            <a:endParaRPr lang="en-US" dirty="0"/>
+          </a:p>
+        </p:txBody>
+      </p:sp>
+      <p:sp>
+        <p:nvSpPr>
+          <p:cNvPr id="3" name="Text 1"/>
+          <p:cNvSpPr/>
+          <p:nvPr/>
+        </p:nvSpPr>
+        <p:spPr>
+          <a:xfrm>
+            <a:off x="406301" y="457051"/>
+            <a:ext cx="8498026" cy="274290"/>
+          </a:xfrm>
+          <a:prstGeom prst="rect">
+            <a:avLst/>
+          </a:prstGeom>
+          <a:noFill/>
+          <a:ln/>
+        </p:spPr>
+        <p:txBody>
+          <a:bodyPr wrap="square" lIns="0" tIns="0" rIns="0" bIns="0" rtlCol="0" anchor="t"/>
+          <a:lstStyle/>
+          <a:p>
+            <a:pPr algn="l" indent="0" marL="0">
+              <a:lnSpc>
+                <a:spcPts val="2160"/>
+              </a:lnSpc>
+              <a:spcBef>
+                <a:spcPts val="600"/>
+              </a:spcBef>
+              <a:spcAft>
+                <a:spcPts val="800"/>
+              </a:spcAft>
+              <a:buNone/>
+            </a:pPr>
+            <a:r>
+              <a:rPr lang="en-US" sz="1800" b="1" dirty="0">
+                <a:solidFill>
+                  <a:srgbClr val="FE4447"/>
+                </a:solidFill>
+                <a:latin typeface="Georgia" pitchFamily="34" charset="0"/>
+                <a:ea typeface="Georgia" pitchFamily="34" charset="-122"/>
+                <a:cs typeface="Georgia" pitchFamily="34" charset="-120"/>
+              </a:rPr>
+              <a:t>Citation(s) used in this lesson</a:t>
+            </a:r>
+            <a:endParaRPr lang="en-US" sz="1800" dirty="0"/>
+          </a:p>
+        </p:txBody>
+      </p:sp>
+      <p:sp>
+        <p:nvSpPr>
+          <p:cNvPr id="4" name="Text 2"/>
+          <p:cNvSpPr/>
+          <p:nvPr/>
+        </p:nvSpPr>
+        <p:spPr>
+          <a:xfrm>
+            <a:off x="634901" y="883593"/>
+            <a:ext cx="8102798" cy="281880"/>
+          </a:xfrm>
+          <a:prstGeom prst="rect">
+            <a:avLst/>
+          </a:prstGeom>
+          <a:noFill/>
+          <a:ln/>
+        </p:spPr>
+        <p:txBody>
+          <a:bodyPr wrap="square" lIns="0" tIns="0" rIns="0" bIns="0" rtlCol="0" anchor="t"/>
+          <a:lstStyle/>
+          <a:p>
+            <a:pPr algn="l" marL="342900" indent="-342900">
+              <a:lnSpc>
+                <a:spcPts val="1620"/>
+              </a:lnSpc>
+              <a:spcAft>
+                <a:spcPts val="300"/>
+              </a:spcAft>
+              <a:buSzPct val="100000"/>
+              <a:buChar char="•"/>
+            </a:pPr>
+            <a:r>
+              <a:rPr lang="en-US" sz="1200" dirty="0">
+                <a:solidFill>
+                  <a:srgbClr val="1C2833"/>
+                </a:solidFill>
+                <a:latin typeface="Arial" pitchFamily="34" charset="0"/>
+                <a:ea typeface="Arial" pitchFamily="34" charset="-122"/>
+                <a:cs typeface="Arial" pitchFamily="34" charset="-120"/>
+              </a:rPr>
+              <a:t>No new citations introduced. Review citations from Day 1–3.</a:t>
             </a:r>
             <a:endParaRPr lang="en-US" sz="1200" dirty="0"/>
           </a:p>
@@ -3705,7 +5157,7 @@
                 <a:ea typeface="Georgia" pitchFamily="34" charset="-122"/>
                 <a:cs typeface="Georgia" pitchFamily="34" charset="-120"/>
               </a:rPr>
-              <a:t>Materials</a:t>
+              <a:t>Learning objective</a:t>
             </a:r>
             <a:endParaRPr lang="en-US" sz="1800" dirty="0"/>
           </a:p>
@@ -3720,7 +5172,7 @@
         <p:spPr>
           <a:xfrm>
             <a:off x="406301" y="870942"/>
-            <a:ext cx="8498026" cy="213271"/>
+            <a:ext cx="8498026" cy="426541"/>
           </a:xfrm>
           <a:prstGeom prst="rect">
             <a:avLst/>
@@ -3753,7 +5205,7 @@
                 <a:ea typeface="Arial" pitchFamily="34" charset="-122"/>
                 <a:cs typeface="Arial" pitchFamily="34" charset="-120"/>
               </a:rPr>
-              <a:t>– Students bring their 3 home-objects from yesterday's homework.</a:t>
+              <a:t>By the end of this lesson, students will classify at least 12 everyday objects by their dominant element and defend a classification where more than one element is present.</a:t>
             </a:r>
             <a:endParaRPr lang="en-US" sz="1200" dirty="0"/>
           </a:p>
@@ -3762,146 +5214,6 @@
       <p:sp>
         <p:nvSpPr>
           <p:cNvPr id="5" name="Text 3"/>
-          <p:cNvSpPr/>
-          <p:nvPr/>
-        </p:nvSpPr>
-        <p:spPr>
-          <a:xfrm>
-            <a:off x="634901" y="1173063"/>
-            <a:ext cx="8102798" cy="487561"/>
-          </a:xfrm>
-          <a:prstGeom prst="rect">
-            <a:avLst/>
-          </a:prstGeom>
-          <a:noFill/>
-          <a:ln/>
-        </p:spPr>
-        <p:txBody>
-          <a:bodyPr wrap="square" lIns="0" tIns="0" rIns="0" bIns="0" rtlCol="0" anchor="t"/>
-          <a:lstStyle/>
-          <a:p>
-            <a:pPr algn="l" marL="342900" indent="-342900">
-              <a:lnSpc>
-                <a:spcPts val="1620"/>
-              </a:lnSpc>
-              <a:spcAft>
-                <a:spcPts val="300"/>
-              </a:spcAft>
-              <a:buSzPct val="100000"/>
-              <a:buChar char="•"/>
-            </a:pPr>
-            <a:r>
-              <a:rPr lang="en-US" sz="1200" dirty="0">
-                <a:solidFill>
-                  <a:srgbClr val="1C2833"/>
-                </a:solidFill>
-                <a:latin typeface="Arial" pitchFamily="34" charset="0"/>
-                <a:ea typeface="Arial" pitchFamily="34" charset="-122"/>
-                <a:cs typeface="Arial" pitchFamily="34" charset="-120"/>
-              </a:rPr>
-              <a:t>~5 mystery objects supplied by the teacher (suggested: a bicycle pump, a glass of milk, a magnifying glass, a small mirror, a sponge).</a:t>
-            </a:r>
-            <a:endParaRPr lang="en-US" sz="1200" dirty="0"/>
-          </a:p>
-        </p:txBody>
-      </p:sp>
-      <p:sp>
-        <p:nvSpPr>
-          <p:cNvPr id="6" name="Text 4"/>
-          <p:cNvSpPr/>
-          <p:nvPr/>
-        </p:nvSpPr>
-        <p:spPr>
-          <a:xfrm>
-            <a:off x="406301" y="1749475"/>
-            <a:ext cx="8498026" cy="436066"/>
-          </a:xfrm>
-          <a:prstGeom prst="rect">
-            <a:avLst/>
-          </a:prstGeom>
-          <a:noFill/>
-          <a:ln/>
-        </p:spPr>
-        <p:txBody>
-          <a:bodyPr wrap="square" lIns="0" tIns="0" rIns="0" bIns="0" rtlCol="0" anchor="t"/>
-          <a:lstStyle/>
-          <a:p>
-            <a:pPr algn="l" indent="0" marL="0">
-              <a:lnSpc>
-                <a:spcPts val="1680"/>
-              </a:lnSpc>
-              <a:spcBef>
-                <a:spcPts val="300"/>
-              </a:spcBef>
-              <a:spcAft>
-                <a:spcPts val="300"/>
-              </a:spcAft>
-              <a:buNone/>
-            </a:pPr>
-            <a:r>
-              <a:rPr lang="en-US" sz="1200" dirty="0">
-                <a:solidFill>
-                  <a:srgbClr val="1C2833"/>
-                </a:solidFill>
-                <a:latin typeface="Arial" pitchFamily="34" charset="0"/>
-                <a:ea typeface="Arial" pitchFamily="34" charset="-122"/>
-                <a:cs typeface="Arial" pitchFamily="34" charset="-120"/>
-              </a:rPr>
-              <a:t>– 5 sorting trays / boxes / labelled areas on the floor — one per element. – Worksheet (one per pair) — printable from </a:t>
-            </a:r>
-            <a:pPr algn="l" indent="0" marL="0">
-              <a:lnSpc>
-                <a:spcPts val="1680"/>
-              </a:lnSpc>
-              <a:spcBef>
-                <a:spcPts val="300"/>
-              </a:spcBef>
-              <a:spcAft>
-                <a:spcPts val="300"/>
-              </a:spcAft>
-              <a:buNone/>
-            </a:pPr>
-            <a:r>
-              <a:rPr lang="en-US" sz="1200" dirty="0">
-                <a:solidFill>
-                  <a:srgbClr val="1C2833"/>
-                </a:solidFill>
-                <a:latin typeface="Arial" pitchFamily="34" charset="0"/>
-                <a:ea typeface="Arial" pitchFamily="34" charset="-122"/>
-                <a:cs typeface="Arial" pitchFamily="34" charset="-120"/>
-              </a:rPr>
-              <a:t>activities/activity-01-element-sort.md</a:t>
-            </a:r>
-            <a:pPr algn="l" indent="0" marL="0">
-              <a:lnSpc>
-                <a:spcPts val="1680"/>
-              </a:lnSpc>
-              <a:spcBef>
-                <a:spcPts val="300"/>
-              </a:spcBef>
-              <a:spcAft>
-                <a:spcPts val="300"/>
-              </a:spcAft>
-              <a:buNone/>
-            </a:pPr>
-            <a:r>
-              <a:rPr lang="en-US" sz="1200" dirty="0">
-                <a:solidFill>
-                  <a:srgbClr val="1C2833"/>
-                </a:solidFill>
-                <a:latin typeface="Arial" pitchFamily="34" charset="0"/>
-                <a:ea typeface="Arial" pitchFamily="34" charset="-122"/>
-                <a:cs typeface="Arial" pitchFamily="34" charset="-120"/>
-              </a:rPr>
-              <a:t>.</a:t>
-            </a:r>
-            <a:endParaRPr lang="en-US" sz="1200" dirty="0"/>
-          </a:p>
-        </p:txBody>
-      </p:sp>
-      <p:sp>
-        <p:nvSpPr>
-          <p:cNvPr id="7" name="Text 5"/>
           <p:cNvSpPr/>
           <p:nvPr/>
         </p:nvSpPr>
@@ -4051,7 +5363,7 @@
                 <a:ea typeface="Georgia" pitchFamily="34" charset="-122"/>
                 <a:cs typeface="Georgia" pitchFamily="34" charset="-120"/>
               </a:rPr>
-              <a:t>Vocabulary recap</a:t>
+              <a:t>Materials</a:t>
             </a:r>
             <a:endParaRPr lang="en-US" sz="1800" dirty="0"/>
           </a:p>
@@ -4065,8 +5377,8 @@
         </p:nvSpPr>
         <p:spPr>
           <a:xfrm>
-            <a:off x="406301" y="870942"/>
-            <a:ext cx="8498026" cy="213271"/>
+            <a:off x="634901" y="883593"/>
+            <a:ext cx="8102798" cy="1237952"/>
           </a:xfrm>
           <a:prstGeom prst="rect">
             <a:avLst/>
@@ -4078,74 +5390,138 @@
           <a:bodyPr wrap="square" lIns="0" tIns="0" rIns="0" bIns="0" rtlCol="0" anchor="t"/>
           <a:lstStyle/>
           <a:p>
-            <a:pPr algn="l" indent="0" marL="0">
-              <a:lnSpc>
-                <a:spcPts val="1680"/>
-              </a:lnSpc>
-              <a:spcBef>
-                <a:spcPts val="300"/>
-              </a:spcBef>
-              <a:spcAft>
-                <a:spcPts val="300"/>
-              </a:spcAft>
-              <a:buNone/>
-            </a:pPr>
-            <a:r>
-              <a:rPr lang="en-US" sz="1200" dirty="0">
-                <a:solidFill>
-                  <a:srgbClr val="1C2833"/>
-                </a:solidFill>
-                <a:latin typeface="Arial" pitchFamily="34" charset="0"/>
-                <a:ea typeface="Arial" pitchFamily="34" charset="-122"/>
-                <a:cs typeface="Arial" pitchFamily="34" charset="-120"/>
-              </a:rPr>
-              <a:t>No new terms today. Review </a:t>
-            </a:r>
-            <a:pPr algn="l" indent="0" marL="0">
-              <a:lnSpc>
-                <a:spcPts val="1680"/>
-              </a:lnSpc>
-              <a:spcBef>
-                <a:spcPts val="300"/>
-              </a:spcBef>
-              <a:spcAft>
-                <a:spcPts val="300"/>
-              </a:spcAft>
-              <a:buNone/>
-            </a:pPr>
-            <a:r>
-              <a:rPr lang="en-US" sz="1200" i="1" dirty="0">
-                <a:solidFill>
-                  <a:srgbClr val="1C2833"/>
-                </a:solidFill>
-                <a:latin typeface="Arial" pitchFamily="34" charset="0"/>
-                <a:ea typeface="Arial" pitchFamily="34" charset="-122"/>
-                <a:cs typeface="Arial" pitchFamily="34" charset="-120"/>
-              </a:rPr>
-              <a:t>pṛthvī, ap, tejas, vāyu, ākāśa</a:t>
-            </a:r>
-            <a:pPr algn="l" indent="0" marL="0">
-              <a:lnSpc>
-                <a:spcPts val="1680"/>
-              </a:lnSpc>
-              <a:spcBef>
-                <a:spcPts val="300"/>
-              </a:spcBef>
-              <a:spcAft>
-                <a:spcPts val="300"/>
-              </a:spcAft>
-              <a:buNone/>
-            </a:pPr>
-            <a:r>
-              <a:rPr lang="en-US" sz="1200" dirty="0">
-                <a:solidFill>
-                  <a:srgbClr val="1C2833"/>
-                </a:solidFill>
-                <a:latin typeface="Arial" pitchFamily="34" charset="0"/>
-                <a:ea typeface="Arial" pitchFamily="34" charset="-122"/>
-                <a:cs typeface="Arial" pitchFamily="34" charset="-120"/>
-              </a:rPr>
-              <a:t> and the five tanmātras.</a:t>
+            <a:pPr algn="l" marL="342900" indent="-342900">
+              <a:lnSpc>
+                <a:spcPts val="1620"/>
+              </a:lnSpc>
+              <a:spcAft>
+                <a:spcPts val="300"/>
+              </a:spcAft>
+              <a:buSzPct val="100000"/>
+              <a:buChar char="•"/>
+            </a:pPr>
+            <a:r>
+              <a:rPr lang="en-US" sz="1200" dirty="0">
+                <a:solidFill>
+                  <a:srgbClr val="1C2833"/>
+                </a:solidFill>
+                <a:latin typeface="Arial" pitchFamily="34" charset="0"/>
+                <a:ea typeface="Arial" pitchFamily="34" charset="-122"/>
+                <a:cs typeface="Arial" pitchFamily="34" charset="-120"/>
+              </a:rPr>
+              <a:t>Students bring their 3 home-objects from yesterday's homework.</a:t>
+            </a:r>
+            <a:endParaRPr lang="en-US" sz="1200" dirty="0"/>
+          </a:p>
+          <a:p>
+            <a:pPr algn="l" marL="342900" indent="-342900">
+              <a:lnSpc>
+                <a:spcPts val="1620"/>
+              </a:lnSpc>
+              <a:spcAft>
+                <a:spcPts val="300"/>
+              </a:spcAft>
+              <a:buSzPct val="100000"/>
+              <a:buChar char="•"/>
+            </a:pPr>
+            <a:r>
+              <a:rPr lang="en-US" sz="1200" dirty="0">
+                <a:solidFill>
+                  <a:srgbClr val="1C2833"/>
+                </a:solidFill>
+                <a:latin typeface="Arial" pitchFamily="34" charset="0"/>
+                <a:ea typeface="Arial" pitchFamily="34" charset="-122"/>
+                <a:cs typeface="Arial" pitchFamily="34" charset="-120"/>
+              </a:rPr>
+              <a:t>~5 mystery objects supplied by the teacher (suggested: a bicycle pump, a glass of milk, a magnifying glass, a small mirror, a sponge).</a:t>
+            </a:r>
+            <a:endParaRPr lang="en-US" sz="1200" dirty="0"/>
+          </a:p>
+          <a:p>
+            <a:pPr algn="l" marL="342900" indent="-342900">
+              <a:lnSpc>
+                <a:spcPts val="1620"/>
+              </a:lnSpc>
+              <a:spcAft>
+                <a:spcPts val="300"/>
+              </a:spcAft>
+              <a:buSzPct val="100000"/>
+              <a:buChar char="•"/>
+            </a:pPr>
+            <a:r>
+              <a:rPr lang="en-US" sz="1200" dirty="0">
+                <a:solidFill>
+                  <a:srgbClr val="1C2833"/>
+                </a:solidFill>
+                <a:latin typeface="Arial" pitchFamily="34" charset="0"/>
+                <a:ea typeface="Arial" pitchFamily="34" charset="-122"/>
+                <a:cs typeface="Arial" pitchFamily="34" charset="-120"/>
+              </a:rPr>
+              <a:t>5 sorting trays / boxes / labelled areas on the floor — one per element.</a:t>
+            </a:r>
+            <a:endParaRPr lang="en-US" sz="1200" dirty="0"/>
+          </a:p>
+          <a:p>
+            <a:pPr algn="l" marL="342900" indent="-342900">
+              <a:lnSpc>
+                <a:spcPts val="1620"/>
+              </a:lnSpc>
+              <a:spcAft>
+                <a:spcPts val="300"/>
+              </a:spcAft>
+              <a:buSzPct val="100000"/>
+              <a:buChar char="•"/>
+            </a:pPr>
+            <a:r>
+              <a:rPr lang="en-US" sz="1200" dirty="0">
+                <a:solidFill>
+                  <a:srgbClr val="1C2833"/>
+                </a:solidFill>
+                <a:latin typeface="Arial" pitchFamily="34" charset="0"/>
+                <a:ea typeface="Arial" pitchFamily="34" charset="-122"/>
+                <a:cs typeface="Arial" pitchFamily="34" charset="-120"/>
+              </a:rPr>
+              <a:t>Worksheet (one per pair) — printable from </a:t>
+            </a:r>
+            <a:pPr algn="l" indent="0" marL="0">
+              <a:lnSpc>
+                <a:spcPts val="1620"/>
+              </a:lnSpc>
+              <a:spcAft>
+                <a:spcPts val="300"/>
+              </a:spcAft>
+              <a:buNone/>
+            </a:pPr>
+            <a:r>
+              <a:rPr lang="en-US" sz="1200" dirty="0">
+                <a:solidFill>
+                  <a:srgbClr val="1C2833"/>
+                </a:solidFill>
+                <a:latin typeface="Arial" pitchFamily="34" charset="0"/>
+                <a:ea typeface="Arial" pitchFamily="34" charset="-122"/>
+                <a:cs typeface="Arial" pitchFamily="34" charset="-120"/>
+              </a:rPr>
+              <a:t>activities/activity-01-element-sort.md</a:t>
+            </a:r>
+            <a:pPr algn="l" indent="0" marL="0">
+              <a:lnSpc>
+                <a:spcPts val="1620"/>
+              </a:lnSpc>
+              <a:spcAft>
+                <a:spcPts val="300"/>
+              </a:spcAft>
+              <a:buNone/>
+            </a:pPr>
+            <a:r>
+              <a:rPr lang="en-US" sz="1200" dirty="0">
+                <a:solidFill>
+                  <a:srgbClr val="1C2833"/>
+                </a:solidFill>
+                <a:latin typeface="Arial" pitchFamily="34" charset="0"/>
+                <a:ea typeface="Arial" pitchFamily="34" charset="-122"/>
+                <a:cs typeface="Arial" pitchFamily="34" charset="-120"/>
+              </a:rPr>
+              <a:t>.</a:t>
             </a:r>
             <a:endParaRPr lang="en-US" sz="1200" dirty="0"/>
           </a:p>
@@ -4303,7 +5679,7 @@
                 <a:ea typeface="Georgia" pitchFamily="34" charset="-122"/>
                 <a:cs typeface="Georgia" pitchFamily="34" charset="-120"/>
               </a:rPr>
-              <a:t>Lesson flow</a:t>
+              <a:t>Vocabulary recap</a:t>
             </a:r>
             <a:endParaRPr lang="en-US" sz="1800" dirty="0"/>
           </a:p>
@@ -4312,6 +5688,100 @@
       <p:sp>
         <p:nvSpPr>
           <p:cNvPr id="4" name="Text 2"/>
+          <p:cNvSpPr/>
+          <p:nvPr/>
+        </p:nvSpPr>
+        <p:spPr>
+          <a:xfrm>
+            <a:off x="406301" y="870942"/>
+            <a:ext cx="8498026" cy="213271"/>
+          </a:xfrm>
+          <a:prstGeom prst="rect">
+            <a:avLst/>
+          </a:prstGeom>
+          <a:noFill/>
+          <a:ln/>
+        </p:spPr>
+        <p:txBody>
+          <a:bodyPr wrap="square" lIns="0" tIns="0" rIns="0" bIns="0" rtlCol="0" anchor="t"/>
+          <a:lstStyle/>
+          <a:p>
+            <a:pPr algn="l" indent="0" marL="0">
+              <a:lnSpc>
+                <a:spcPts val="1680"/>
+              </a:lnSpc>
+              <a:spcBef>
+                <a:spcPts val="300"/>
+              </a:spcBef>
+              <a:spcAft>
+                <a:spcPts val="300"/>
+              </a:spcAft>
+              <a:buNone/>
+            </a:pPr>
+            <a:r>
+              <a:rPr lang="en-US" sz="1200" dirty="0">
+                <a:solidFill>
+                  <a:srgbClr val="1C2833"/>
+                </a:solidFill>
+                <a:latin typeface="Arial" pitchFamily="34" charset="0"/>
+                <a:ea typeface="Arial" pitchFamily="34" charset="-122"/>
+                <a:cs typeface="Arial" pitchFamily="34" charset="-120"/>
+              </a:rPr>
+              <a:t>No new terms today. Review </a:t>
+            </a:r>
+            <a:pPr algn="l" indent="0" marL="0">
+              <a:lnSpc>
+                <a:spcPts val="1680"/>
+              </a:lnSpc>
+              <a:spcBef>
+                <a:spcPts val="300"/>
+              </a:spcBef>
+              <a:spcAft>
+                <a:spcPts val="300"/>
+              </a:spcAft>
+              <a:buNone/>
+            </a:pPr>
+            <a:r>
+              <a:rPr lang="en-US" sz="1200" i="1" dirty="0">
+                <a:solidFill>
+                  <a:srgbClr val="1C2833"/>
+                </a:solidFill>
+                <a:latin typeface="Arial" pitchFamily="34" charset="0"/>
+                <a:ea typeface="Arial" pitchFamily="34" charset="-122"/>
+                <a:cs typeface="Arial" pitchFamily="34" charset="-120"/>
+              </a:rPr>
+              <a:t>pṛthvī, ap, tejas, vāyu, ākāśa</a:t>
+            </a:r>
+            <a:pPr algn="l" indent="0" marL="0">
+              <a:lnSpc>
+                <a:spcPts val="1680"/>
+              </a:lnSpc>
+              <a:spcBef>
+                <a:spcPts val="300"/>
+              </a:spcBef>
+              <a:spcAft>
+                <a:spcPts val="300"/>
+              </a:spcAft>
+              <a:buNone/>
+            </a:pPr>
+            <a:r>
+              <a:rPr lang="en-US" sz="1200" dirty="0">
+                <a:solidFill>
+                  <a:srgbClr val="1C2833"/>
+                </a:solidFill>
+                <a:latin typeface="Arial" pitchFamily="34" charset="0"/>
+                <a:ea typeface="Arial" pitchFamily="34" charset="-122"/>
+                <a:cs typeface="Arial" pitchFamily="34" charset="-120"/>
+              </a:rPr>
+              <a:t> and the five tanmātras.</a:t>
+            </a:r>
+            <a:endParaRPr lang="en-US" sz="1200" dirty="0"/>
+          </a:p>
+        </p:txBody>
+      </p:sp>
+      <p:sp>
+        <p:nvSpPr>
+          <p:cNvPr id="5" name="Text 3"/>
           <p:cNvSpPr/>
           <p:nvPr/>
         </p:nvSpPr>
@@ -4461,7 +5931,7 @@
                 <a:ea typeface="Georgia" pitchFamily="34" charset="-122"/>
                 <a:cs typeface="Georgia" pitchFamily="34" charset="-120"/>
               </a:rPr>
-              <a:t>Warm-up (5 min)</a:t>
+              <a:t>Lesson flow</a:t>
             </a:r>
             <a:endParaRPr lang="en-US" sz="1800" dirty="0"/>
           </a:p>
@@ -4470,100 +5940,6 @@
       <p:sp>
         <p:nvSpPr>
           <p:cNvPr id="4" name="Text 2"/>
-          <p:cNvSpPr/>
-          <p:nvPr/>
-        </p:nvSpPr>
-        <p:spPr>
-          <a:xfrm>
-            <a:off x="406301" y="870942"/>
-            <a:ext cx="8498026" cy="426541"/>
-          </a:xfrm>
-          <a:prstGeom prst="rect">
-            <a:avLst/>
-          </a:prstGeom>
-          <a:noFill/>
-          <a:ln/>
-        </p:spPr>
-        <p:txBody>
-          <a:bodyPr wrap="square" lIns="0" tIns="0" rIns="0" bIns="0" rtlCol="0" anchor="t"/>
-          <a:lstStyle/>
-          <a:p>
-            <a:pPr algn="l" indent="0" marL="0">
-              <a:lnSpc>
-                <a:spcPts val="1680"/>
-              </a:lnSpc>
-              <a:spcBef>
-                <a:spcPts val="300"/>
-              </a:spcBef>
-              <a:spcAft>
-                <a:spcPts val="300"/>
-              </a:spcAft>
-              <a:buNone/>
-            </a:pPr>
-            <a:r>
-              <a:rPr lang="en-US" sz="1200" dirty="0">
-                <a:solidFill>
-                  <a:srgbClr val="1C2833"/>
-                </a:solidFill>
-                <a:latin typeface="Arial" pitchFamily="34" charset="0"/>
-                <a:ea typeface="Arial" pitchFamily="34" charset="-122"/>
-                <a:cs typeface="Arial" pitchFamily="34" charset="-120"/>
-              </a:rPr>
-              <a:t>– Daily prompt: </a:t>
-            </a:r>
-            <a:pPr algn="l" indent="0" marL="0">
-              <a:lnSpc>
-                <a:spcPts val="1680"/>
-              </a:lnSpc>
-              <a:spcBef>
-                <a:spcPts val="300"/>
-              </a:spcBef>
-              <a:spcAft>
-                <a:spcPts val="300"/>
-              </a:spcAft>
-              <a:buNone/>
-            </a:pPr>
-            <a:r>
-              <a:rPr lang="en-US" sz="1200" i="1" dirty="0">
-                <a:solidFill>
-                  <a:srgbClr val="1C2833"/>
-                </a:solidFill>
-                <a:latin typeface="Arial" pitchFamily="34" charset="0"/>
-                <a:ea typeface="Arial" pitchFamily="34" charset="-122"/>
-                <a:cs typeface="Arial" pitchFamily="34" charset="-120"/>
-              </a:rPr>
-              <a:t>"Which element did you notice most yesterday?"</a:t>
-            </a:r>
-            <a:pPr algn="l" indent="0" marL="0">
-              <a:lnSpc>
-                <a:spcPts val="1680"/>
-              </a:lnSpc>
-              <a:spcBef>
-                <a:spcPts val="300"/>
-              </a:spcBef>
-              <a:spcAft>
-                <a:spcPts val="300"/>
-              </a:spcAft>
-              <a:buNone/>
-            </a:pPr>
-            <a:r>
-              <a:rPr lang="en-US" sz="1200" dirty="0">
-                <a:solidFill>
-                  <a:srgbClr val="1C2833"/>
-                </a:solidFill>
-                <a:latin typeface="Arial" pitchFamily="34" charset="0"/>
-                <a:ea typeface="Arial" pitchFamily="34" charset="-122"/>
-                <a:cs typeface="Arial" pitchFamily="34" charset="-120"/>
-              </a:rPr>
-              <a:t> — 2 students. – Brief: today is a sorting day. We'll see how messy the world really is when you try to put it in five boxes.</a:t>
-            </a:r>
-            <a:endParaRPr lang="en-US" sz="1200" dirty="0"/>
-          </a:p>
-        </p:txBody>
-      </p:sp>
-      <p:sp>
-        <p:nvSpPr>
-          <p:cNvPr id="5" name="Text 3"/>
           <p:cNvSpPr/>
           <p:nvPr/>
         </p:nvSpPr>
@@ -4713,7 +6089,7 @@
                 <a:ea typeface="Georgia" pitchFamily="34" charset="-122"/>
                 <a:cs typeface="Georgia" pitchFamily="34" charset="-120"/>
               </a:rPr>
-              <a:t>Core (10 min) — Demonstrate with one tricky object</a:t>
+              <a:t>Warm-up (5 min)</a:t>
             </a:r>
             <a:endParaRPr lang="en-US" sz="1800" dirty="0"/>
           </a:p>
@@ -4727,8 +6103,8 @@
         </p:nvSpPr>
         <p:spPr>
           <a:xfrm>
-            <a:off x="406301" y="870942"/>
-            <a:ext cx="8498026" cy="639812"/>
+            <a:off x="634901" y="883593"/>
+            <a:ext cx="8102798" cy="525661"/>
           </a:xfrm>
           <a:prstGeom prst="rect">
             <a:avLst/>
@@ -4740,36 +6116,31 @@
           <a:bodyPr wrap="square" lIns="0" tIns="0" rIns="0" bIns="0" rtlCol="0" anchor="t"/>
           <a:lstStyle/>
           <a:p>
-            <a:pPr algn="l" indent="0" marL="0">
-              <a:lnSpc>
-                <a:spcPts val="1680"/>
-              </a:lnSpc>
-              <a:spcBef>
-                <a:spcPts val="300"/>
-              </a:spcBef>
-              <a:spcAft>
-                <a:spcPts val="300"/>
-              </a:spcAft>
-              <a:buNone/>
-            </a:pPr>
-            <a:r>
-              <a:rPr lang="en-US" sz="1200" dirty="0">
-                <a:solidFill>
-                  <a:srgbClr val="1C2833"/>
-                </a:solidFill>
-                <a:latin typeface="Arial" pitchFamily="34" charset="0"/>
-                <a:ea typeface="Arial" pitchFamily="34" charset="-122"/>
-                <a:cs typeface="Arial" pitchFamily="34" charset="-120"/>
-              </a:rPr>
-              <a:t>– Hold up a glass of milk. </a:t>
-            </a:r>
-            <a:pPr algn="l" indent="0" marL="0">
-              <a:lnSpc>
-                <a:spcPts val="1680"/>
-              </a:lnSpc>
-              <a:spcBef>
-                <a:spcPts val="300"/>
-              </a:spcBef>
+            <a:pPr algn="l" marL="342900" indent="-342900">
+              <a:lnSpc>
+                <a:spcPts val="1620"/>
+              </a:lnSpc>
+              <a:spcAft>
+                <a:spcPts val="300"/>
+              </a:spcAft>
+              <a:buSzPct val="100000"/>
+              <a:buChar char="•"/>
+            </a:pPr>
+            <a:r>
+              <a:rPr lang="en-US" sz="1200" dirty="0">
+                <a:solidFill>
+                  <a:srgbClr val="1C2833"/>
+                </a:solidFill>
+                <a:latin typeface="Arial" pitchFamily="34" charset="0"/>
+                <a:ea typeface="Arial" pitchFamily="34" charset="-122"/>
+                <a:cs typeface="Arial" pitchFamily="34" charset="-120"/>
+              </a:rPr>
+              <a:t>Daily prompt: </a:t>
+            </a:r>
+            <a:pPr algn="l" indent="0" marL="0">
+              <a:lnSpc>
+                <a:spcPts val="1620"/>
+              </a:lnSpc>
               <a:spcAft>
                 <a:spcPts val="300"/>
               </a:spcAft>
@@ -4784,500 +6155,59 @@
                 <a:ea typeface="Arial" pitchFamily="34" charset="-122"/>
                 <a:cs typeface="Arial" pitchFamily="34" charset="-120"/>
               </a:rPr>
-              <a:t>"Where does this go?"</a:t>
-            </a:r>
-            <a:pPr algn="l" indent="0" marL="0">
-              <a:lnSpc>
-                <a:spcPts val="1680"/>
-              </a:lnSpc>
-              <a:spcBef>
-                <a:spcPts val="300"/>
-              </a:spcBef>
-              <a:spcAft>
-                <a:spcPts val="300"/>
-              </a:spcAft>
-              <a:buNone/>
-            </a:pPr>
-            <a:r>
-              <a:rPr lang="en-US" sz="1200" dirty="0">
-                <a:solidFill>
-                  <a:srgbClr val="1C2833"/>
-                </a:solidFill>
-                <a:latin typeface="Arial" pitchFamily="34" charset="0"/>
-                <a:ea typeface="Arial" pitchFamily="34" charset="-122"/>
-                <a:cs typeface="Arial" pitchFamily="34" charset="-120"/>
-              </a:rPr>
-              <a:t> – Take 3 student answers. – Then walk through it together: – It's a </a:t>
-            </a:r>
-            <a:pPr algn="l" indent="0" marL="0">
-              <a:lnSpc>
-                <a:spcPts val="1680"/>
-              </a:lnSpc>
-              <a:spcBef>
-                <a:spcPts val="300"/>
-              </a:spcBef>
-              <a:spcAft>
-                <a:spcPts val="300"/>
-              </a:spcAft>
-              <a:buNone/>
-            </a:pPr>
-            <a:r>
-              <a:rPr lang="en-US" sz="1200" i="1" dirty="0">
-                <a:solidFill>
-                  <a:srgbClr val="1C2833"/>
-                </a:solidFill>
-                <a:latin typeface="Arial" pitchFamily="34" charset="0"/>
-                <a:ea typeface="Arial" pitchFamily="34" charset="-122"/>
-                <a:cs typeface="Arial" pitchFamily="34" charset="-120"/>
-              </a:rPr>
-              <a:t>liquid</a:t>
-            </a:r>
-            <a:pPr algn="l" indent="0" marL="0">
-              <a:lnSpc>
-                <a:spcPts val="1680"/>
-              </a:lnSpc>
-              <a:spcBef>
-                <a:spcPts val="300"/>
-              </a:spcBef>
-              <a:spcAft>
-                <a:spcPts val="300"/>
-              </a:spcAft>
-              <a:buNone/>
-            </a:pPr>
-            <a:r>
-              <a:rPr lang="en-US" sz="1200" dirty="0">
-                <a:solidFill>
-                  <a:srgbClr val="1C2833"/>
-                </a:solidFill>
-                <a:latin typeface="Arial" pitchFamily="34" charset="0"/>
-                <a:ea typeface="Arial" pitchFamily="34" charset="-122"/>
-                <a:cs typeface="Arial" pitchFamily="34" charset="-120"/>
-              </a:rPr>
-              <a:t> → </a:t>
-            </a:r>
-            <a:pPr algn="l" indent="0" marL="0">
-              <a:lnSpc>
-                <a:spcPts val="1680"/>
-              </a:lnSpc>
-              <a:spcBef>
-                <a:spcPts val="300"/>
-              </a:spcBef>
-              <a:spcAft>
-                <a:spcPts val="300"/>
-              </a:spcAft>
-              <a:buNone/>
-            </a:pPr>
-            <a:r>
-              <a:rPr lang="en-US" sz="1200" i="1" dirty="0">
-                <a:solidFill>
-                  <a:srgbClr val="1C2833"/>
-                </a:solidFill>
-                <a:latin typeface="Arial" pitchFamily="34" charset="0"/>
-                <a:ea typeface="Arial" pitchFamily="34" charset="-122"/>
-                <a:cs typeface="Arial" pitchFamily="34" charset="-120"/>
-              </a:rPr>
-              <a:t>ap</a:t>
-            </a:r>
-            <a:pPr algn="l" indent="0" marL="0">
-              <a:lnSpc>
-                <a:spcPts val="1680"/>
-              </a:lnSpc>
-              <a:spcBef>
-                <a:spcPts val="300"/>
-              </a:spcBef>
-              <a:spcAft>
-                <a:spcPts val="300"/>
-              </a:spcAft>
-              <a:buNone/>
-            </a:pPr>
-            <a:r>
-              <a:rPr lang="en-US" sz="1200" dirty="0">
-                <a:solidFill>
-                  <a:srgbClr val="1C2833"/>
-                </a:solidFill>
-                <a:latin typeface="Arial" pitchFamily="34" charset="0"/>
-                <a:ea typeface="Arial" pitchFamily="34" charset="-122"/>
-                <a:cs typeface="Arial" pitchFamily="34" charset="-120"/>
-              </a:rPr>
-              <a:t> (water-element). – But milk has </a:t>
-            </a:r>
-            <a:pPr algn="l" indent="0" marL="0">
-              <a:lnSpc>
-                <a:spcPts val="1680"/>
-              </a:lnSpc>
-              <a:spcBef>
-                <a:spcPts val="300"/>
-              </a:spcBef>
-              <a:spcAft>
-                <a:spcPts val="300"/>
-              </a:spcAft>
-              <a:buNone/>
-            </a:pPr>
-            <a:r>
-              <a:rPr lang="en-US" sz="1200" i="1" dirty="0">
-                <a:solidFill>
-                  <a:srgbClr val="1C2833"/>
-                </a:solidFill>
-                <a:latin typeface="Arial" pitchFamily="34" charset="0"/>
-                <a:ea typeface="Arial" pitchFamily="34" charset="-122"/>
-                <a:cs typeface="Arial" pitchFamily="34" charset="-120"/>
-              </a:rPr>
-              <a:t>fat</a:t>
-            </a:r>
-            <a:pPr algn="l" indent="0" marL="0">
-              <a:lnSpc>
-                <a:spcPts val="1680"/>
-              </a:lnSpc>
-              <a:spcBef>
-                <a:spcPts val="300"/>
-              </a:spcBef>
-              <a:spcAft>
-                <a:spcPts val="300"/>
-              </a:spcAft>
-              <a:buNone/>
-            </a:pPr>
-            <a:r>
-              <a:rPr lang="en-US" sz="1200" dirty="0">
-                <a:solidFill>
-                  <a:srgbClr val="1C2833"/>
-                </a:solidFill>
-                <a:latin typeface="Arial" pitchFamily="34" charset="0"/>
-                <a:ea typeface="Arial" pitchFamily="34" charset="-122"/>
-                <a:cs typeface="Arial" pitchFamily="34" charset="-120"/>
-              </a:rPr>
-              <a:t> (solid suspended particles) → some </a:t>
-            </a:r>
-            <a:pPr algn="l" indent="0" marL="0">
-              <a:lnSpc>
-                <a:spcPts val="1680"/>
-              </a:lnSpc>
-              <a:spcBef>
-                <a:spcPts val="300"/>
-              </a:spcBef>
-              <a:spcAft>
-                <a:spcPts val="300"/>
-              </a:spcAft>
-              <a:buNone/>
-            </a:pPr>
-            <a:r>
-              <a:rPr lang="en-US" sz="1200" i="1" dirty="0">
-                <a:solidFill>
-                  <a:srgbClr val="1C2833"/>
-                </a:solidFill>
-                <a:latin typeface="Arial" pitchFamily="34" charset="0"/>
-                <a:ea typeface="Arial" pitchFamily="34" charset="-122"/>
-                <a:cs typeface="Arial" pitchFamily="34" charset="-120"/>
-              </a:rPr>
-              <a:t>pṛthvī</a:t>
-            </a:r>
-            <a:pPr algn="l" indent="0" marL="0">
-              <a:lnSpc>
-                <a:spcPts val="1680"/>
-              </a:lnSpc>
-              <a:spcBef>
-                <a:spcPts val="300"/>
-              </a:spcBef>
-              <a:spcAft>
-                <a:spcPts val="300"/>
-              </a:spcAft>
-              <a:buNone/>
-            </a:pPr>
-            <a:r>
-              <a:rPr lang="en-US" sz="1200" dirty="0">
-                <a:solidFill>
-                  <a:srgbClr val="1C2833"/>
-                </a:solidFill>
-                <a:latin typeface="Arial" pitchFamily="34" charset="0"/>
-                <a:ea typeface="Arial" pitchFamily="34" charset="-122"/>
-                <a:cs typeface="Arial" pitchFamily="34" charset="-120"/>
-              </a:rPr>
-              <a:t>. – It has </a:t>
-            </a:r>
-            <a:pPr algn="l" indent="0" marL="0">
-              <a:lnSpc>
-                <a:spcPts val="1680"/>
-              </a:lnSpc>
-              <a:spcBef>
-                <a:spcPts val="300"/>
-              </a:spcBef>
-              <a:spcAft>
-                <a:spcPts val="300"/>
-              </a:spcAft>
-              <a:buNone/>
-            </a:pPr>
-            <a:r>
-              <a:rPr lang="en-US" sz="1200" i="1" dirty="0">
-                <a:solidFill>
-                  <a:srgbClr val="1C2833"/>
-                </a:solidFill>
-                <a:latin typeface="Arial" pitchFamily="34" charset="0"/>
-                <a:ea typeface="Arial" pitchFamily="34" charset="-122"/>
-                <a:cs typeface="Arial" pitchFamily="34" charset="-120"/>
-              </a:rPr>
-              <a:t>taste</a:t>
-            </a:r>
-            <a:pPr algn="l" indent="0" marL="0">
-              <a:lnSpc>
-                <a:spcPts val="1680"/>
-              </a:lnSpc>
-              <a:spcBef>
-                <a:spcPts val="300"/>
-              </a:spcBef>
-              <a:spcAft>
-                <a:spcPts val="300"/>
-              </a:spcAft>
-              <a:buNone/>
-            </a:pPr>
-            <a:r>
-              <a:rPr lang="en-US" sz="1200" dirty="0">
-                <a:solidFill>
-                  <a:srgbClr val="1C2833"/>
-                </a:solidFill>
-                <a:latin typeface="Arial" pitchFamily="34" charset="0"/>
-                <a:ea typeface="Arial" pitchFamily="34" charset="-122"/>
-                <a:cs typeface="Arial" pitchFamily="34" charset="-120"/>
-              </a:rPr>
-              <a:t> (rasa) → tanmātra of water, confirms. – It has </a:t>
-            </a:r>
-            <a:pPr algn="l" indent="0" marL="0">
-              <a:lnSpc>
-                <a:spcPts val="1680"/>
-              </a:lnSpc>
-              <a:spcBef>
-                <a:spcPts val="300"/>
-              </a:spcBef>
-              <a:spcAft>
-                <a:spcPts val="300"/>
-              </a:spcAft>
-              <a:buNone/>
-            </a:pPr>
-            <a:r>
-              <a:rPr lang="en-US" sz="1200" i="1" dirty="0">
-                <a:solidFill>
-                  <a:srgbClr val="1C2833"/>
-                </a:solidFill>
-                <a:latin typeface="Arial" pitchFamily="34" charset="0"/>
-                <a:ea typeface="Arial" pitchFamily="34" charset="-122"/>
-                <a:cs typeface="Arial" pitchFamily="34" charset="-120"/>
-              </a:rPr>
-              <a:t>smell</a:t>
-            </a:r>
-            <a:pPr algn="l" indent="0" marL="0">
-              <a:lnSpc>
-                <a:spcPts val="1680"/>
-              </a:lnSpc>
-              <a:spcBef>
-                <a:spcPts val="300"/>
-              </a:spcBef>
-              <a:spcAft>
-                <a:spcPts val="300"/>
-              </a:spcAft>
-              <a:buNone/>
-            </a:pPr>
-            <a:r>
-              <a:rPr lang="en-US" sz="1200" dirty="0">
-                <a:solidFill>
-                  <a:srgbClr val="1C2833"/>
-                </a:solidFill>
-                <a:latin typeface="Arial" pitchFamily="34" charset="0"/>
-                <a:ea typeface="Arial" pitchFamily="34" charset="-122"/>
-                <a:cs typeface="Arial" pitchFamily="34" charset="-120"/>
-              </a:rPr>
-              <a:t> (gandha) → some earth-quality too. – You can </a:t>
-            </a:r>
-            <a:pPr algn="l" indent="0" marL="0">
-              <a:lnSpc>
-                <a:spcPts val="1680"/>
-              </a:lnSpc>
-              <a:spcBef>
-                <a:spcPts val="300"/>
-              </a:spcBef>
-              <a:spcAft>
-                <a:spcPts val="300"/>
-              </a:spcAft>
-              <a:buNone/>
-            </a:pPr>
-            <a:r>
-              <a:rPr lang="en-US" sz="1200" i="1" dirty="0">
-                <a:solidFill>
-                  <a:srgbClr val="1C2833"/>
-                </a:solidFill>
-                <a:latin typeface="Arial" pitchFamily="34" charset="0"/>
-                <a:ea typeface="Arial" pitchFamily="34" charset="-122"/>
-                <a:cs typeface="Arial" pitchFamily="34" charset="-120"/>
-              </a:rPr>
-              <a:t>see</a:t>
-            </a:r>
-            <a:pPr algn="l" indent="0" marL="0">
-              <a:lnSpc>
-                <a:spcPts val="1680"/>
-              </a:lnSpc>
-              <a:spcBef>
-                <a:spcPts val="300"/>
-              </a:spcBef>
-              <a:spcAft>
-                <a:spcPts val="300"/>
-              </a:spcAft>
-              <a:buNone/>
-            </a:pPr>
-            <a:r>
-              <a:rPr lang="en-US" sz="1200" dirty="0">
-                <a:solidFill>
-                  <a:srgbClr val="1C2833"/>
-                </a:solidFill>
-                <a:latin typeface="Arial" pitchFamily="34" charset="0"/>
-                <a:ea typeface="Arial" pitchFamily="34" charset="-122"/>
-                <a:cs typeface="Arial" pitchFamily="34" charset="-120"/>
-              </a:rPr>
-              <a:t> it (rūpa) → some fire-quality (form/colour).</a:t>
+              <a:t>"Which element did you notice most yesterday?"</a:t>
+            </a:r>
+            <a:pPr algn="l" indent="0" marL="0">
+              <a:lnSpc>
+                <a:spcPts val="1620"/>
+              </a:lnSpc>
+              <a:spcAft>
+                <a:spcPts val="300"/>
+              </a:spcAft>
+              <a:buNone/>
+            </a:pPr>
+            <a:r>
+              <a:rPr lang="en-US" sz="1200" dirty="0">
+                <a:solidFill>
+                  <a:srgbClr val="1C2833"/>
+                </a:solidFill>
+                <a:latin typeface="Arial" pitchFamily="34" charset="0"/>
+                <a:ea typeface="Arial" pitchFamily="34" charset="-122"/>
+                <a:cs typeface="Arial" pitchFamily="34" charset="-120"/>
+              </a:rPr>
+              <a:t> — 2 students.</a:t>
             </a:r>
             <a:endParaRPr lang="en-US" sz="1200" dirty="0"/>
           </a:p>
+          <a:p>
+            <a:pPr algn="l" marL="342900" indent="-342900">
+              <a:lnSpc>
+                <a:spcPts val="1620"/>
+              </a:lnSpc>
+              <a:spcAft>
+                <a:spcPts val="300"/>
+              </a:spcAft>
+              <a:buSzPct val="100000"/>
+              <a:buChar char="•"/>
+            </a:pPr>
+            <a:r>
+              <a:rPr lang="en-US" sz="1200" dirty="0">
+                <a:solidFill>
+                  <a:srgbClr val="1C2833"/>
+                </a:solidFill>
+                <a:latin typeface="Arial" pitchFamily="34" charset="0"/>
+                <a:ea typeface="Arial" pitchFamily="34" charset="-122"/>
+                <a:cs typeface="Arial" pitchFamily="34" charset="-120"/>
+              </a:rPr>
+              <a:t>Brief: today is a sorting day. We'll see how messy the world really is when you try to put it in five boxes.</a:t>
+            </a:r>
+            <a:endParaRPr lang="en-US" sz="1200" dirty="0"/>
+          </a:p>
         </p:txBody>
       </p:sp>
       <p:sp>
         <p:nvSpPr>
           <p:cNvPr id="5" name="Text 3"/>
-          <p:cNvSpPr/>
-          <p:nvPr/>
-        </p:nvSpPr>
-        <p:spPr>
-          <a:xfrm>
-            <a:off x="406301" y="1586954"/>
-            <a:ext cx="8498026" cy="426541"/>
-          </a:xfrm>
-          <a:prstGeom prst="rect">
-            <a:avLst/>
-          </a:prstGeom>
-          <a:noFill/>
-          <a:ln/>
-        </p:spPr>
-        <p:txBody>
-          <a:bodyPr wrap="square" lIns="0" tIns="0" rIns="0" bIns="0" rtlCol="0" anchor="t"/>
-          <a:lstStyle/>
-          <a:p>
-            <a:pPr algn="l" indent="0" marL="0">
-              <a:lnSpc>
-                <a:spcPts val="1680"/>
-              </a:lnSpc>
-              <a:spcBef>
-                <a:spcPts val="300"/>
-              </a:spcBef>
-              <a:spcAft>
-                <a:spcPts val="300"/>
-              </a:spcAft>
-              <a:buNone/>
-            </a:pPr>
-            <a:r>
-              <a:rPr lang="en-US" sz="1200" dirty="0">
-                <a:solidFill>
-                  <a:srgbClr val="1C2833"/>
-                </a:solidFill>
-                <a:latin typeface="Arial" pitchFamily="34" charset="0"/>
-                <a:ea typeface="Arial" pitchFamily="34" charset="-122"/>
-                <a:cs typeface="Arial" pitchFamily="34" charset="-120"/>
-              </a:rPr>
-              <a:t>– Conclusion: </a:t>
-            </a:r>
-            <a:pPr algn="l" indent="0" marL="0">
-              <a:lnSpc>
-                <a:spcPts val="1680"/>
-              </a:lnSpc>
-              <a:spcBef>
-                <a:spcPts val="300"/>
-              </a:spcBef>
-              <a:spcAft>
-                <a:spcPts val="300"/>
-              </a:spcAft>
-              <a:buNone/>
-            </a:pPr>
-            <a:r>
-              <a:rPr lang="en-US" sz="1200" b="1" dirty="0">
-                <a:solidFill>
-                  <a:srgbClr val="1C2833"/>
-                </a:solidFill>
-                <a:latin typeface="Arial" pitchFamily="34" charset="0"/>
-                <a:ea typeface="Arial" pitchFamily="34" charset="-122"/>
-                <a:cs typeface="Arial" pitchFamily="34" charset="-120"/>
-              </a:rPr>
-              <a:t>most real objects are mixtures.</a:t>
-            </a:r>
-            <a:pPr algn="l" indent="0" marL="0">
-              <a:lnSpc>
-                <a:spcPts val="1680"/>
-              </a:lnSpc>
-              <a:spcBef>
-                <a:spcPts val="300"/>
-              </a:spcBef>
-              <a:spcAft>
-                <a:spcPts val="300"/>
-              </a:spcAft>
-              <a:buNone/>
-            </a:pPr>
-            <a:r>
-              <a:rPr lang="en-US" sz="1200" dirty="0">
-                <a:solidFill>
-                  <a:srgbClr val="1C2833"/>
-                </a:solidFill>
-                <a:latin typeface="Arial" pitchFamily="34" charset="0"/>
-                <a:ea typeface="Arial" pitchFamily="34" charset="-122"/>
-                <a:cs typeface="Arial" pitchFamily="34" charset="-120"/>
-              </a:rPr>
-              <a:t> The exercise is to identify the </a:t>
-            </a:r>
-            <a:pPr algn="l" indent="0" marL="0">
-              <a:lnSpc>
-                <a:spcPts val="1680"/>
-              </a:lnSpc>
-              <a:spcBef>
-                <a:spcPts val="300"/>
-              </a:spcBef>
-              <a:spcAft>
-                <a:spcPts val="300"/>
-              </a:spcAft>
-              <a:buNone/>
-            </a:pPr>
-            <a:r>
-              <a:rPr lang="en-US" sz="1200" i="1" dirty="0">
-                <a:solidFill>
-                  <a:srgbClr val="1C2833"/>
-                </a:solidFill>
-                <a:latin typeface="Arial" pitchFamily="34" charset="0"/>
-                <a:ea typeface="Arial" pitchFamily="34" charset="-122"/>
-                <a:cs typeface="Arial" pitchFamily="34" charset="-120"/>
-              </a:rPr>
-              <a:t>dominant</a:t>
-            </a:r>
-            <a:pPr algn="l" indent="0" marL="0">
-              <a:lnSpc>
-                <a:spcPts val="1680"/>
-              </a:lnSpc>
-              <a:spcBef>
-                <a:spcPts val="300"/>
-              </a:spcBef>
-              <a:spcAft>
-                <a:spcPts val="300"/>
-              </a:spcAft>
-              <a:buNone/>
-            </a:pPr>
-            <a:r>
-              <a:rPr lang="en-US" sz="1200" dirty="0">
-                <a:solidFill>
-                  <a:srgbClr val="1C2833"/>
-                </a:solidFill>
-                <a:latin typeface="Arial" pitchFamily="34" charset="0"/>
-                <a:ea typeface="Arial" pitchFamily="34" charset="-122"/>
-                <a:cs typeface="Arial" pitchFamily="34" charset="-120"/>
-              </a:rPr>
-              <a:t> element while honestly naming the others present.</a:t>
-            </a:r>
-            <a:endParaRPr lang="en-US" sz="1200" dirty="0"/>
-          </a:p>
-        </p:txBody>
-      </p:sp>
-      <p:sp>
-        <p:nvSpPr>
-          <p:cNvPr id="6" name="Text 4"/>
           <p:cNvSpPr/>
           <p:nvPr/>
         </p:nvSpPr>
@@ -5427,7 +6357,7 @@
                 <a:ea typeface="Georgia" pitchFamily="34" charset="-122"/>
                 <a:cs typeface="Georgia" pitchFamily="34" charset="-120"/>
               </a:rPr>
-              <a:t>Activity (25 min) — Element Sort</a:t>
+              <a:t>Core (10 min) — Demonstrate with one tricky object</a:t>
             </a:r>
             <a:endParaRPr lang="en-US" sz="1800" dirty="0"/>
           </a:p>
@@ -5441,8 +6371,8 @@
         </p:nvSpPr>
         <p:spPr>
           <a:xfrm>
-            <a:off x="406301" y="870942"/>
-            <a:ext cx="8498026" cy="222796"/>
+            <a:off x="634901" y="883593"/>
+            <a:ext cx="8102798" cy="1988344"/>
           </a:xfrm>
           <a:prstGeom prst="rect">
             <a:avLst/>
@@ -5454,100 +6384,6 @@
           <a:bodyPr wrap="square" lIns="0" tIns="0" rIns="0" bIns="0" rtlCol="0" anchor="t"/>
           <a:lstStyle/>
           <a:p>
-            <a:pPr algn="l" indent="0" marL="0">
-              <a:lnSpc>
-                <a:spcPts val="1680"/>
-              </a:lnSpc>
-              <a:spcBef>
-                <a:spcPts val="300"/>
-              </a:spcBef>
-              <a:spcAft>
-                <a:spcPts val="300"/>
-              </a:spcAft>
-              <a:buNone/>
-            </a:pPr>
-            <a:r>
-              <a:rPr lang="en-US" sz="1200" dirty="0">
-                <a:solidFill>
-                  <a:srgbClr val="1C2833"/>
-                </a:solidFill>
-                <a:latin typeface="Arial" pitchFamily="34" charset="0"/>
-                <a:ea typeface="Arial" pitchFamily="34" charset="-122"/>
-                <a:cs typeface="Arial" pitchFamily="34" charset="-120"/>
-              </a:rPr>
-              <a:t>Follow the full activity sheet (</a:t>
-            </a:r>
-            <a:pPr algn="l" indent="0" marL="0">
-              <a:lnSpc>
-                <a:spcPts val="1680"/>
-              </a:lnSpc>
-              <a:spcBef>
-                <a:spcPts val="300"/>
-              </a:spcBef>
-              <a:spcAft>
-                <a:spcPts val="300"/>
-              </a:spcAft>
-              <a:buNone/>
-            </a:pPr>
-            <a:r>
-              <a:rPr lang="en-US" sz="1200" dirty="0">
-                <a:solidFill>
-                  <a:srgbClr val="1C2833"/>
-                </a:solidFill>
-                <a:latin typeface="Arial" pitchFamily="34" charset="0"/>
-                <a:ea typeface="Arial" pitchFamily="34" charset="-122"/>
-                <a:cs typeface="Arial" pitchFamily="34" charset="-120"/>
-              </a:rPr>
-              <a:t>activities/activity-01-element-sort.md</a:t>
-            </a:r>
-            <a:pPr algn="l" indent="0" marL="0">
-              <a:lnSpc>
-                <a:spcPts val="1680"/>
-              </a:lnSpc>
-              <a:spcBef>
-                <a:spcPts val="300"/>
-              </a:spcBef>
-              <a:spcAft>
-                <a:spcPts val="300"/>
-              </a:spcAft>
-              <a:buNone/>
-            </a:pPr>
-            <a:r>
-              <a:rPr lang="en-US" sz="1200" dirty="0">
-                <a:solidFill>
-                  <a:srgbClr val="1C2833"/>
-                </a:solidFill>
-                <a:latin typeface="Arial" pitchFamily="34" charset="0"/>
-                <a:ea typeface="Arial" pitchFamily="34" charset="-122"/>
-                <a:cs typeface="Arial" pitchFamily="34" charset="-120"/>
-              </a:rPr>
-              <a:t>). Brief outline:</a:t>
-            </a:r>
-            <a:endParaRPr lang="en-US" sz="1200" dirty="0"/>
-          </a:p>
-        </p:txBody>
-      </p:sp>
-      <p:sp>
-        <p:nvSpPr>
-          <p:cNvPr id="5" name="Text 3"/>
-          <p:cNvSpPr/>
-          <p:nvPr/>
-        </p:nvSpPr>
-        <p:spPr>
-          <a:xfrm>
-            <a:off x="634901" y="1182588"/>
-            <a:ext cx="8102798" cy="769441"/>
-          </a:xfrm>
-          <a:prstGeom prst="rect">
-            <a:avLst/>
-          </a:prstGeom>
-          <a:noFill/>
-          <a:ln/>
-        </p:spPr>
-        <p:txBody>
-          <a:bodyPr wrap="square" lIns="0" tIns="0" rIns="0" bIns="0" rtlCol="0" anchor="t"/>
-          <a:lstStyle/>
-          <a:p>
             <a:pPr algn="l" marL="342900" indent="-342900">
               <a:lnSpc>
                 <a:spcPts val="1620"/>
@@ -5567,47 +6403,27 @@
                 <a:ea typeface="Arial" pitchFamily="34" charset="-122"/>
                 <a:cs typeface="Arial" pitchFamily="34" charset="-120"/>
               </a:rPr>
-              <a:t>Students work in </a:t>
-            </a:r>
-            <a:pPr algn="l" indent="0" marL="0">
-              <a:lnSpc>
-                <a:spcPts val="1620"/>
-              </a:lnSpc>
-              <a:spcAft>
-                <a:spcPts val="300"/>
-              </a:spcAft>
-              <a:buNone/>
-            </a:pPr>
-            <a:r>
-              <a:rPr lang="en-US" sz="1200" b="1" dirty="0">
-                <a:solidFill>
-                  <a:srgbClr val="1C2833"/>
-                </a:solidFill>
-                <a:latin typeface="Arial" pitchFamily="34" charset="0"/>
-                <a:ea typeface="Arial" pitchFamily="34" charset="-122"/>
-                <a:cs typeface="Arial" pitchFamily="34" charset="-120"/>
-              </a:rPr>
-              <a:t>pairs</a:t>
-            </a:r>
-            <a:pPr algn="l" indent="0" marL="0">
-              <a:lnSpc>
-                <a:spcPts val="1620"/>
-              </a:lnSpc>
-              <a:spcAft>
-                <a:spcPts val="300"/>
-              </a:spcAft>
-              <a:buNone/>
-            </a:pPr>
-            <a:r>
-              <a:rPr lang="en-US" sz="1200" dirty="0">
-                <a:solidFill>
-                  <a:srgbClr val="1C2833"/>
-                </a:solidFill>
-                <a:latin typeface="Arial" pitchFamily="34" charset="0"/>
-                <a:ea typeface="Arial" pitchFamily="34" charset="-122"/>
-                <a:cs typeface="Arial" pitchFamily="34" charset="-120"/>
-              </a:rPr>
-              <a:t>.</a:t>
+              <a:t>Hold up a glass of milk. </a:t>
+            </a:r>
+            <a:pPr algn="l" indent="0" marL="0">
+              <a:lnSpc>
+                <a:spcPts val="1620"/>
+              </a:lnSpc>
+              <a:spcAft>
+                <a:spcPts val="300"/>
+              </a:spcAft>
+              <a:buNone/>
+            </a:pPr>
+            <a:r>
+              <a:rPr lang="en-US" sz="1200" i="1" dirty="0">
+                <a:solidFill>
+                  <a:srgbClr val="1C2833"/>
+                </a:solidFill>
+                <a:latin typeface="Arial" pitchFamily="34" charset="0"/>
+                <a:ea typeface="Arial" pitchFamily="34" charset="-122"/>
+                <a:cs typeface="Arial" pitchFamily="34" charset="-120"/>
+              </a:rPr>
+              <a:t>"Where does this go?"</a:t>
             </a:r>
             <a:endParaRPr lang="en-US" sz="1200" dirty="0"/>
           </a:p>
@@ -5631,7 +6447,7 @@
                 <a:ea typeface="Arial" pitchFamily="34" charset="-122"/>
                 <a:cs typeface="Arial" pitchFamily="34" charset="-120"/>
               </a:rPr>
-              <a:t>Each pair places their 3 home-objects + 2 teacher-supplied objects on the right element tray. (5 objects per pair.)</a:t>
+              <a:t>Take 3 student answers.</a:t>
             </a:r>
             <a:endParaRPr lang="en-US" sz="1200" dirty="0"/>
           </a:p>
@@ -5655,80 +6471,10 @@
                 <a:ea typeface="Arial" pitchFamily="34" charset="-122"/>
                 <a:cs typeface="Arial" pitchFamily="34" charset="-120"/>
               </a:rPr>
-              <a:t>For each object, they fill the worksheet table:</a:t>
+              <a:t>Then walk through it together:</a:t>
             </a:r>
             <a:endParaRPr lang="en-US" sz="1200" dirty="0"/>
           </a:p>
-        </p:txBody>
-      </p:sp>
-      <p:sp>
-        <p:nvSpPr>
-          <p:cNvPr id="6" name="Text 4"/>
-          <p:cNvSpPr/>
-          <p:nvPr/>
-        </p:nvSpPr>
-        <p:spPr>
-          <a:xfrm>
-            <a:off x="406301" y="2040880"/>
-            <a:ext cx="8498026" cy="213271"/>
-          </a:xfrm>
-          <a:prstGeom prst="rect">
-            <a:avLst/>
-          </a:prstGeom>
-          <a:noFill/>
-          <a:ln/>
-        </p:spPr>
-        <p:txBody>
-          <a:bodyPr wrap="square" lIns="0" tIns="0" rIns="0" bIns="0" rtlCol="0" anchor="t"/>
-          <a:lstStyle/>
-          <a:p>
-            <a:pPr algn="l" indent="0" marL="0">
-              <a:lnSpc>
-                <a:spcPts val="1680"/>
-              </a:lnSpc>
-              <a:spcBef>
-                <a:spcPts val="300"/>
-              </a:spcBef>
-              <a:spcAft>
-                <a:spcPts val="300"/>
-              </a:spcAft>
-              <a:buNone/>
-            </a:pPr>
-            <a:r>
-              <a:rPr lang="en-US" sz="1200" dirty="0">
-                <a:solidFill>
-                  <a:srgbClr val="1C2833"/>
-                </a:solidFill>
-                <a:latin typeface="Arial" pitchFamily="34" charset="0"/>
-                <a:ea typeface="Arial" pitchFamily="34" charset="-122"/>
-                <a:cs typeface="Arial" pitchFamily="34" charset="-120"/>
-              </a:rPr>
-              <a:t>– Object name    – Dominant element    – Other elements present (1–4 more)    – Strongest tanmātra</a:t>
-            </a:r>
-            <a:endParaRPr lang="en-US" sz="1200" dirty="0"/>
-          </a:p>
-        </p:txBody>
-      </p:sp>
-      <p:sp>
-        <p:nvSpPr>
-          <p:cNvPr id="7" name="Text 5"/>
-          <p:cNvSpPr/>
-          <p:nvPr/>
-        </p:nvSpPr>
-        <p:spPr>
-          <a:xfrm>
-            <a:off x="634901" y="2343001"/>
-            <a:ext cx="8102798" cy="487561"/>
-          </a:xfrm>
-          <a:prstGeom prst="rect">
-            <a:avLst/>
-          </a:prstGeom>
-          <a:noFill/>
-          <a:ln/>
-        </p:spPr>
-        <p:txBody>
-          <a:bodyPr wrap="square" lIns="0" tIns="0" rIns="0" bIns="0" rtlCol="0" anchor="t"/>
-          <a:lstStyle/>
           <a:p>
             <a:pPr algn="l" marL="342900" indent="-342900">
               <a:lnSpc>
@@ -5741,43 +6487,399 @@
               <a:buChar char="•"/>
             </a:pPr>
             <a:r>
-              <a:rPr lang="en-US" sz="1200" b="1" dirty="0">
-                <a:solidFill>
-                  <a:srgbClr val="1C2833"/>
-                </a:solidFill>
-                <a:latin typeface="Arial" pitchFamily="34" charset="0"/>
-                <a:ea typeface="Arial" pitchFamily="34" charset="-122"/>
-                <a:cs typeface="Arial" pitchFamily="34" charset="-120"/>
-              </a:rPr>
-              <a:t>Gallery walk (5 min within the 25):</a:t>
-            </a:r>
-            <a:pPr algn="l" indent="0" marL="0">
-              <a:lnSpc>
-                <a:spcPts val="1620"/>
-              </a:lnSpc>
-              <a:spcAft>
-                <a:spcPts val="300"/>
-              </a:spcAft>
-              <a:buNone/>
-            </a:pPr>
-            <a:r>
-              <a:rPr lang="en-US" sz="1200" dirty="0">
-                <a:solidFill>
-                  <a:srgbClr val="1C2833"/>
-                </a:solidFill>
-                <a:latin typeface="Arial" pitchFamily="34" charset="0"/>
-                <a:ea typeface="Arial" pitchFamily="34" charset="-122"/>
-                <a:cs typeface="Arial" pitchFamily="34" charset="-120"/>
-              </a:rPr>
-              <a:t> pairs visit two other pairs' trays and put a sticky note where they disagree, explaining briefly.</a:t>
+              <a:rPr lang="en-US" sz="1200" dirty="0">
+                <a:solidFill>
+                  <a:srgbClr val="1C2833"/>
+                </a:solidFill>
+                <a:latin typeface="Arial" pitchFamily="34" charset="0"/>
+                <a:ea typeface="Arial" pitchFamily="34" charset="-122"/>
+                <a:cs typeface="Arial" pitchFamily="34" charset="-120"/>
+              </a:rPr>
+              <a:t>It's a </a:t>
+            </a:r>
+            <a:pPr algn="l" indent="0" marL="0">
+              <a:lnSpc>
+                <a:spcPts val="1620"/>
+              </a:lnSpc>
+              <a:spcAft>
+                <a:spcPts val="300"/>
+              </a:spcAft>
+              <a:buNone/>
+            </a:pPr>
+            <a:r>
+              <a:rPr lang="en-US" sz="1200" i="1" dirty="0">
+                <a:solidFill>
+                  <a:srgbClr val="1C2833"/>
+                </a:solidFill>
+                <a:latin typeface="Arial" pitchFamily="34" charset="0"/>
+                <a:ea typeface="Arial" pitchFamily="34" charset="-122"/>
+                <a:cs typeface="Arial" pitchFamily="34" charset="-120"/>
+              </a:rPr>
+              <a:t>liquid</a:t>
+            </a:r>
+            <a:pPr algn="l" indent="0" marL="0">
+              <a:lnSpc>
+                <a:spcPts val="1620"/>
+              </a:lnSpc>
+              <a:spcAft>
+                <a:spcPts val="300"/>
+              </a:spcAft>
+              <a:buNone/>
+            </a:pPr>
+            <a:r>
+              <a:rPr lang="en-US" sz="1200" dirty="0">
+                <a:solidFill>
+                  <a:srgbClr val="1C2833"/>
+                </a:solidFill>
+                <a:latin typeface="Arial" pitchFamily="34" charset="0"/>
+                <a:ea typeface="Arial" pitchFamily="34" charset="-122"/>
+                <a:cs typeface="Arial" pitchFamily="34" charset="-120"/>
+              </a:rPr>
+              <a:t> → </a:t>
+            </a:r>
+            <a:pPr algn="l" indent="0" marL="0">
+              <a:lnSpc>
+                <a:spcPts val="1620"/>
+              </a:lnSpc>
+              <a:spcAft>
+                <a:spcPts val="300"/>
+              </a:spcAft>
+              <a:buNone/>
+            </a:pPr>
+            <a:r>
+              <a:rPr lang="en-US" sz="1200" i="1" dirty="0">
+                <a:solidFill>
+                  <a:srgbClr val="1C2833"/>
+                </a:solidFill>
+                <a:latin typeface="Arial" pitchFamily="34" charset="0"/>
+                <a:ea typeface="Arial" pitchFamily="34" charset="-122"/>
+                <a:cs typeface="Arial" pitchFamily="34" charset="-120"/>
+              </a:rPr>
+              <a:t>ap</a:t>
+            </a:r>
+            <a:pPr algn="l" indent="0" marL="0">
+              <a:lnSpc>
+                <a:spcPts val="1620"/>
+              </a:lnSpc>
+              <a:spcAft>
+                <a:spcPts val="300"/>
+              </a:spcAft>
+              <a:buNone/>
+            </a:pPr>
+            <a:r>
+              <a:rPr lang="en-US" sz="1200" dirty="0">
+                <a:solidFill>
+                  <a:srgbClr val="1C2833"/>
+                </a:solidFill>
+                <a:latin typeface="Arial" pitchFamily="34" charset="0"/>
+                <a:ea typeface="Arial" pitchFamily="34" charset="-122"/>
+                <a:cs typeface="Arial" pitchFamily="34" charset="-120"/>
+              </a:rPr>
+              <a:t> (water-element).</a:t>
             </a:r>
             <a:endParaRPr lang="en-US" sz="1200" dirty="0"/>
           </a:p>
-        </p:txBody>
-      </p:sp>
-      <p:sp>
-        <p:nvSpPr>
-          <p:cNvPr id="8" name="Text 6"/>
+          <a:p>
+            <a:pPr algn="l" marL="342900" indent="-342900">
+              <a:lnSpc>
+                <a:spcPts val="1620"/>
+              </a:lnSpc>
+              <a:spcAft>
+                <a:spcPts val="300"/>
+              </a:spcAft>
+              <a:buSzPct val="100000"/>
+              <a:buChar char="•"/>
+            </a:pPr>
+            <a:r>
+              <a:rPr lang="en-US" sz="1200" dirty="0">
+                <a:solidFill>
+                  <a:srgbClr val="1C2833"/>
+                </a:solidFill>
+                <a:latin typeface="Arial" pitchFamily="34" charset="0"/>
+                <a:ea typeface="Arial" pitchFamily="34" charset="-122"/>
+                <a:cs typeface="Arial" pitchFamily="34" charset="-120"/>
+              </a:rPr>
+              <a:t>But milk has </a:t>
+            </a:r>
+            <a:pPr algn="l" indent="0" marL="0">
+              <a:lnSpc>
+                <a:spcPts val="1620"/>
+              </a:lnSpc>
+              <a:spcAft>
+                <a:spcPts val="300"/>
+              </a:spcAft>
+              <a:buNone/>
+            </a:pPr>
+            <a:r>
+              <a:rPr lang="en-US" sz="1200" i="1" dirty="0">
+                <a:solidFill>
+                  <a:srgbClr val="1C2833"/>
+                </a:solidFill>
+                <a:latin typeface="Arial" pitchFamily="34" charset="0"/>
+                <a:ea typeface="Arial" pitchFamily="34" charset="-122"/>
+                <a:cs typeface="Arial" pitchFamily="34" charset="-120"/>
+              </a:rPr>
+              <a:t>fat</a:t>
+            </a:r>
+            <a:pPr algn="l" indent="0" marL="0">
+              <a:lnSpc>
+                <a:spcPts val="1620"/>
+              </a:lnSpc>
+              <a:spcAft>
+                <a:spcPts val="300"/>
+              </a:spcAft>
+              <a:buNone/>
+            </a:pPr>
+            <a:r>
+              <a:rPr lang="en-US" sz="1200" dirty="0">
+                <a:solidFill>
+                  <a:srgbClr val="1C2833"/>
+                </a:solidFill>
+                <a:latin typeface="Arial" pitchFamily="34" charset="0"/>
+                <a:ea typeface="Arial" pitchFamily="34" charset="-122"/>
+                <a:cs typeface="Arial" pitchFamily="34" charset="-120"/>
+              </a:rPr>
+              <a:t> (solid suspended particles) → some </a:t>
+            </a:r>
+            <a:pPr algn="l" indent="0" marL="0">
+              <a:lnSpc>
+                <a:spcPts val="1620"/>
+              </a:lnSpc>
+              <a:spcAft>
+                <a:spcPts val="300"/>
+              </a:spcAft>
+              <a:buNone/>
+            </a:pPr>
+            <a:r>
+              <a:rPr lang="en-US" sz="1200" i="1" dirty="0">
+                <a:solidFill>
+                  <a:srgbClr val="1C2833"/>
+                </a:solidFill>
+                <a:latin typeface="Arial" pitchFamily="34" charset="0"/>
+                <a:ea typeface="Arial" pitchFamily="34" charset="-122"/>
+                <a:cs typeface="Arial" pitchFamily="34" charset="-120"/>
+              </a:rPr>
+              <a:t>pṛthvī</a:t>
+            </a:r>
+            <a:pPr algn="l" indent="0" marL="0">
+              <a:lnSpc>
+                <a:spcPts val="1620"/>
+              </a:lnSpc>
+              <a:spcAft>
+                <a:spcPts val="300"/>
+              </a:spcAft>
+              <a:buNone/>
+            </a:pPr>
+            <a:r>
+              <a:rPr lang="en-US" sz="1200" dirty="0">
+                <a:solidFill>
+                  <a:srgbClr val="1C2833"/>
+                </a:solidFill>
+                <a:latin typeface="Arial" pitchFamily="34" charset="0"/>
+                <a:ea typeface="Arial" pitchFamily="34" charset="-122"/>
+                <a:cs typeface="Arial" pitchFamily="34" charset="-120"/>
+              </a:rPr>
+              <a:t>.</a:t>
+            </a:r>
+            <a:endParaRPr lang="en-US" sz="1200" dirty="0"/>
+          </a:p>
+          <a:p>
+            <a:pPr algn="l" marL="342900" indent="-342900">
+              <a:lnSpc>
+                <a:spcPts val="1620"/>
+              </a:lnSpc>
+              <a:spcAft>
+                <a:spcPts val="300"/>
+              </a:spcAft>
+              <a:buSzPct val="100000"/>
+              <a:buChar char="•"/>
+            </a:pPr>
+            <a:r>
+              <a:rPr lang="en-US" sz="1200" dirty="0">
+                <a:solidFill>
+                  <a:srgbClr val="1C2833"/>
+                </a:solidFill>
+                <a:latin typeface="Arial" pitchFamily="34" charset="0"/>
+                <a:ea typeface="Arial" pitchFamily="34" charset="-122"/>
+                <a:cs typeface="Arial" pitchFamily="34" charset="-120"/>
+              </a:rPr>
+              <a:t>It has </a:t>
+            </a:r>
+            <a:pPr algn="l" indent="0" marL="0">
+              <a:lnSpc>
+                <a:spcPts val="1620"/>
+              </a:lnSpc>
+              <a:spcAft>
+                <a:spcPts val="300"/>
+              </a:spcAft>
+              <a:buNone/>
+            </a:pPr>
+            <a:r>
+              <a:rPr lang="en-US" sz="1200" i="1" dirty="0">
+                <a:solidFill>
+                  <a:srgbClr val="1C2833"/>
+                </a:solidFill>
+                <a:latin typeface="Arial" pitchFamily="34" charset="0"/>
+                <a:ea typeface="Arial" pitchFamily="34" charset="-122"/>
+                <a:cs typeface="Arial" pitchFamily="34" charset="-120"/>
+              </a:rPr>
+              <a:t>taste</a:t>
+            </a:r>
+            <a:pPr algn="l" indent="0" marL="0">
+              <a:lnSpc>
+                <a:spcPts val="1620"/>
+              </a:lnSpc>
+              <a:spcAft>
+                <a:spcPts val="300"/>
+              </a:spcAft>
+              <a:buNone/>
+            </a:pPr>
+            <a:r>
+              <a:rPr lang="en-US" sz="1200" dirty="0">
+                <a:solidFill>
+                  <a:srgbClr val="1C2833"/>
+                </a:solidFill>
+                <a:latin typeface="Arial" pitchFamily="34" charset="0"/>
+                <a:ea typeface="Arial" pitchFamily="34" charset="-122"/>
+                <a:cs typeface="Arial" pitchFamily="34" charset="-120"/>
+              </a:rPr>
+              <a:t> (rasa) → tanmātra of water, confirms.</a:t>
+            </a:r>
+            <a:endParaRPr lang="en-US" sz="1200" dirty="0"/>
+          </a:p>
+          <a:p>
+            <a:pPr algn="l" marL="342900" indent="-342900">
+              <a:lnSpc>
+                <a:spcPts val="1620"/>
+              </a:lnSpc>
+              <a:spcAft>
+                <a:spcPts val="300"/>
+              </a:spcAft>
+              <a:buSzPct val="100000"/>
+              <a:buChar char="•"/>
+            </a:pPr>
+            <a:r>
+              <a:rPr lang="en-US" sz="1200" dirty="0">
+                <a:solidFill>
+                  <a:srgbClr val="1C2833"/>
+                </a:solidFill>
+                <a:latin typeface="Arial" pitchFamily="34" charset="0"/>
+                <a:ea typeface="Arial" pitchFamily="34" charset="-122"/>
+                <a:cs typeface="Arial" pitchFamily="34" charset="-120"/>
+              </a:rPr>
+              <a:t>It has </a:t>
+            </a:r>
+            <a:pPr algn="l" indent="0" marL="0">
+              <a:lnSpc>
+                <a:spcPts val="1620"/>
+              </a:lnSpc>
+              <a:spcAft>
+                <a:spcPts val="300"/>
+              </a:spcAft>
+              <a:buNone/>
+            </a:pPr>
+            <a:r>
+              <a:rPr lang="en-US" sz="1200" i="1" dirty="0">
+                <a:solidFill>
+                  <a:srgbClr val="1C2833"/>
+                </a:solidFill>
+                <a:latin typeface="Arial" pitchFamily="34" charset="0"/>
+                <a:ea typeface="Arial" pitchFamily="34" charset="-122"/>
+                <a:cs typeface="Arial" pitchFamily="34" charset="-120"/>
+              </a:rPr>
+              <a:t>smell</a:t>
+            </a:r>
+            <a:pPr algn="l" indent="0" marL="0">
+              <a:lnSpc>
+                <a:spcPts val="1620"/>
+              </a:lnSpc>
+              <a:spcAft>
+                <a:spcPts val="300"/>
+              </a:spcAft>
+              <a:buNone/>
+            </a:pPr>
+            <a:r>
+              <a:rPr lang="en-US" sz="1200" dirty="0">
+                <a:solidFill>
+                  <a:srgbClr val="1C2833"/>
+                </a:solidFill>
+                <a:latin typeface="Arial" pitchFamily="34" charset="0"/>
+                <a:ea typeface="Arial" pitchFamily="34" charset="-122"/>
+                <a:cs typeface="Arial" pitchFamily="34" charset="-120"/>
+              </a:rPr>
+              <a:t> (gandha) → some earth-quality too.</a:t>
+            </a:r>
+            <a:endParaRPr lang="en-US" sz="1200" dirty="0"/>
+          </a:p>
+          <a:p>
+            <a:pPr algn="l" marL="342900" indent="-342900">
+              <a:lnSpc>
+                <a:spcPts val="1620"/>
+              </a:lnSpc>
+              <a:spcAft>
+                <a:spcPts val="300"/>
+              </a:spcAft>
+              <a:buSzPct val="100000"/>
+              <a:buChar char="•"/>
+            </a:pPr>
+            <a:r>
+              <a:rPr lang="en-US" sz="1200" dirty="0">
+                <a:solidFill>
+                  <a:srgbClr val="1C2833"/>
+                </a:solidFill>
+                <a:latin typeface="Arial" pitchFamily="34" charset="0"/>
+                <a:ea typeface="Arial" pitchFamily="34" charset="-122"/>
+                <a:cs typeface="Arial" pitchFamily="34" charset="-120"/>
+              </a:rPr>
+              <a:t>You can </a:t>
+            </a:r>
+            <a:pPr algn="l" indent="0" marL="0">
+              <a:lnSpc>
+                <a:spcPts val="1620"/>
+              </a:lnSpc>
+              <a:spcAft>
+                <a:spcPts val="300"/>
+              </a:spcAft>
+              <a:buNone/>
+            </a:pPr>
+            <a:r>
+              <a:rPr lang="en-US" sz="1200" i="1" dirty="0">
+                <a:solidFill>
+                  <a:srgbClr val="1C2833"/>
+                </a:solidFill>
+                <a:latin typeface="Arial" pitchFamily="34" charset="0"/>
+                <a:ea typeface="Arial" pitchFamily="34" charset="-122"/>
+                <a:cs typeface="Arial" pitchFamily="34" charset="-120"/>
+              </a:rPr>
+              <a:t>see</a:t>
+            </a:r>
+            <a:pPr algn="l" indent="0" marL="0">
+              <a:lnSpc>
+                <a:spcPts val="1620"/>
+              </a:lnSpc>
+              <a:spcAft>
+                <a:spcPts val="300"/>
+              </a:spcAft>
+              <a:buNone/>
+            </a:pPr>
+            <a:r>
+              <a:rPr lang="en-US" sz="1200" dirty="0">
+                <a:solidFill>
+                  <a:srgbClr val="1C2833"/>
+                </a:solidFill>
+                <a:latin typeface="Arial" pitchFamily="34" charset="0"/>
+                <a:ea typeface="Arial" pitchFamily="34" charset="-122"/>
+                <a:cs typeface="Arial" pitchFamily="34" charset="-120"/>
+              </a:rPr>
+              <a:t> it (rūpa) → some fire-quality (form/colour).</a:t>
+            </a:r>
+            <a:endParaRPr lang="en-US" sz="1200" dirty="0"/>
+          </a:p>
+        </p:txBody>
+      </p:sp>
+      <p:sp>
+        <p:nvSpPr>
+          <p:cNvPr id="5" name="Text 3"/>
           <p:cNvSpPr/>
           <p:nvPr/>
         </p:nvSpPr>
@@ -5927,7 +7029,7 @@
                 <a:ea typeface="Georgia" pitchFamily="34" charset="-122"/>
                 <a:cs typeface="Georgia" pitchFamily="34" charset="-120"/>
               </a:rPr>
-              <a:t>Wrap-up (5 min)</a:t>
+              <a:t>Core (10 min) — Demonstrate with one tricky object (cont.)</a:t>
             </a:r>
             <a:endParaRPr lang="en-US" sz="1800" dirty="0"/>
           </a:p>
@@ -5941,8 +7043,8 @@
         </p:nvSpPr>
         <p:spPr>
           <a:xfrm>
-            <a:off x="406301" y="870942"/>
-            <a:ext cx="8498026" cy="426541"/>
+            <a:off x="634901" y="883593"/>
+            <a:ext cx="8102798" cy="487561"/>
           </a:xfrm>
           <a:prstGeom prst="rect">
             <a:avLst/>
@@ -5954,36 +7056,71 @@
           <a:bodyPr wrap="square" lIns="0" tIns="0" rIns="0" bIns="0" rtlCol="0" anchor="t"/>
           <a:lstStyle/>
           <a:p>
-            <a:pPr algn="l" indent="0" marL="0">
-              <a:lnSpc>
-                <a:spcPts val="1680"/>
-              </a:lnSpc>
-              <a:spcBef>
-                <a:spcPts val="300"/>
-              </a:spcBef>
-              <a:spcAft>
-                <a:spcPts val="300"/>
-              </a:spcAft>
-              <a:buNone/>
-            </a:pPr>
-            <a:r>
-              <a:rPr lang="en-US" sz="1200" dirty="0">
-                <a:solidFill>
-                  <a:srgbClr val="1C2833"/>
-                </a:solidFill>
-                <a:latin typeface="Arial" pitchFamily="34" charset="0"/>
-                <a:ea typeface="Arial" pitchFamily="34" charset="-122"/>
-                <a:cs typeface="Arial" pitchFamily="34" charset="-120"/>
-              </a:rPr>
-              <a:t>– Discussion question, open to the room: </a:t>
-            </a:r>
-            <a:pPr algn="l" indent="0" marL="0">
-              <a:lnSpc>
-                <a:spcPts val="1680"/>
-              </a:lnSpc>
-              <a:spcBef>
-                <a:spcPts val="300"/>
-              </a:spcBef>
+            <a:pPr algn="l" marL="342900" indent="-342900">
+              <a:lnSpc>
+                <a:spcPts val="1620"/>
+              </a:lnSpc>
+              <a:spcAft>
+                <a:spcPts val="300"/>
+              </a:spcAft>
+              <a:buSzPct val="100000"/>
+              <a:buChar char="•"/>
+            </a:pPr>
+            <a:r>
+              <a:rPr lang="en-US" sz="1200" dirty="0">
+                <a:solidFill>
+                  <a:srgbClr val="1C2833"/>
+                </a:solidFill>
+                <a:latin typeface="Arial" pitchFamily="34" charset="0"/>
+                <a:ea typeface="Arial" pitchFamily="34" charset="-122"/>
+                <a:cs typeface="Arial" pitchFamily="34" charset="-120"/>
+              </a:rPr>
+              <a:t>Conclusion: </a:t>
+            </a:r>
+            <a:pPr algn="l" indent="0" marL="0">
+              <a:lnSpc>
+                <a:spcPts val="1620"/>
+              </a:lnSpc>
+              <a:spcAft>
+                <a:spcPts val="300"/>
+              </a:spcAft>
+              <a:buNone/>
+            </a:pPr>
+            <a:r>
+              <a:rPr lang="en-US" sz="1200" b="1" dirty="0">
+                <a:solidFill>
+                  <a:srgbClr val="1C2833"/>
+                </a:solidFill>
+                <a:latin typeface="Arial" pitchFamily="34" charset="0"/>
+                <a:ea typeface="Arial" pitchFamily="34" charset="-122"/>
+                <a:cs typeface="Arial" pitchFamily="34" charset="-120"/>
+              </a:rPr>
+              <a:t>most real objects are mixtures.</a:t>
+            </a:r>
+            <a:pPr algn="l" indent="0" marL="0">
+              <a:lnSpc>
+                <a:spcPts val="1620"/>
+              </a:lnSpc>
+              <a:spcAft>
+                <a:spcPts val="300"/>
+              </a:spcAft>
+              <a:buNone/>
+            </a:pPr>
+            <a:r>
+              <a:rPr lang="en-US" sz="1200" dirty="0">
+                <a:solidFill>
+                  <a:srgbClr val="1C2833"/>
+                </a:solidFill>
+                <a:latin typeface="Arial" pitchFamily="34" charset="0"/>
+                <a:ea typeface="Arial" pitchFamily="34" charset="-122"/>
+                <a:cs typeface="Arial" pitchFamily="34" charset="-120"/>
+              </a:rPr>
+              <a:t> The exercise is to identify the </a:t>
+            </a:r>
+            <a:pPr algn="l" indent="0" marL="0">
+              <a:lnSpc>
+                <a:spcPts val="1620"/>
+              </a:lnSpc>
               <a:spcAft>
                 <a:spcPts val="300"/>
               </a:spcAft>
@@ -5998,30 +7135,27 @@
                 <a:ea typeface="Arial" pitchFamily="34" charset="-122"/>
                 <a:cs typeface="Arial" pitchFamily="34" charset="-120"/>
               </a:rPr>
-              <a:t>"Which object was the hardest to classify, and why?"</a:t>
-            </a:r>
-            <a:pPr algn="l" indent="0" marL="0">
-              <a:lnSpc>
-                <a:spcPts val="1680"/>
-              </a:lnSpc>
-              <a:spcBef>
-                <a:spcPts val="300"/>
-              </a:spcBef>
-              <a:spcAft>
-                <a:spcPts val="300"/>
-              </a:spcAft>
-              <a:buNone/>
-            </a:pPr>
-            <a:r>
-              <a:rPr lang="en-US" sz="1200" dirty="0">
-                <a:solidFill>
-                  <a:srgbClr val="1C2833"/>
-                </a:solidFill>
-                <a:latin typeface="Arial" pitchFamily="34" charset="0"/>
-                <a:ea typeface="Arial" pitchFamily="34" charset="-122"/>
-                <a:cs typeface="Arial" pitchFamily="34" charset="-120"/>
-              </a:rPr>
-              <a:t> – Preview Day 5: a mid-module check + an extended reflection.</a:t>
+              <a:t>dominant</a:t>
+            </a:r>
+            <a:pPr algn="l" indent="0" marL="0">
+              <a:lnSpc>
+                <a:spcPts val="1620"/>
+              </a:lnSpc>
+              <a:spcAft>
+                <a:spcPts val="300"/>
+              </a:spcAft>
+              <a:buNone/>
+            </a:pPr>
+            <a:r>
+              <a:rPr lang="en-US" sz="1200" dirty="0">
+                <a:solidFill>
+                  <a:srgbClr val="1C2833"/>
+                </a:solidFill>
+                <a:latin typeface="Arial" pitchFamily="34" charset="0"/>
+                <a:ea typeface="Arial" pitchFamily="34" charset="-122"/>
+                <a:cs typeface="Arial" pitchFamily="34" charset="-120"/>
+              </a:rPr>
+              <a:t> element while honestly naming the others present.</a:t>
             </a:r>
             <a:endParaRPr lang="en-US" sz="1200" dirty="0"/>
           </a:p>
@@ -6179,7 +7313,7 @@
                 <a:ea typeface="Georgia" pitchFamily="34" charset="-122"/>
                 <a:cs typeface="Georgia" pitchFamily="34" charset="-120"/>
               </a:rPr>
-              <a:t>Student-facing content</a:t>
+              <a:t>Activity (25 min) — Element Sort</a:t>
             </a:r>
             <a:endParaRPr lang="en-US" sz="1800" dirty="0"/>
           </a:p>
@@ -6227,7 +7361,7 @@
                 <a:ea typeface="Arial" pitchFamily="34" charset="-122"/>
                 <a:cs typeface="Arial" pitchFamily="34" charset="-120"/>
               </a:rPr>
-              <a:t>(The activity sheet is the student-facing content — see </a:t>
+              <a:t>Follow the full activity sheet (</a:t>
             </a:r>
             <a:pPr algn="l" indent="0" marL="0">
               <a:lnSpc>
@@ -6273,7 +7407,7 @@
                 <a:ea typeface="Arial" pitchFamily="34" charset="-122"/>
                 <a:cs typeface="Arial" pitchFamily="34" charset="-120"/>
               </a:rPr>
-              <a:t>.)</a:t>
+              <a:t>). Brief outline:</a:t>
             </a:r>
             <a:endParaRPr lang="en-US" sz="1200" dirty="0"/>
           </a:p>
